--- a/docs/slides/Modulo 3/dia_5.pptx
+++ b/docs/slides/Modulo 3/dia_5.pptx
@@ -5,17 +5,22 @@
     <p:sldMasterId id="2147483648" r:id="rId1"/>
   </p:sldMasterIdLst>
   <p:sldIdLst>
-    <p:sldId id="256" r:id="rId7"/>
-    <p:sldId id="257" r:id="rId8"/>
-    <p:sldId id="258" r:id="rId9"/>
-    <p:sldId id="259" r:id="rId10"/>
-    <p:sldId id="260" r:id="rId11"/>
-    <p:sldId id="261" r:id="rId12"/>
-    <p:sldId id="262" r:id="rId13"/>
-    <p:sldId id="263" r:id="rId14"/>
-    <p:sldId id="264" r:id="rId15"/>
+    <p:sldId id="256" r:id="rId2"/>
+    <p:sldId id="257" r:id="rId3"/>
+    <p:sldId id="258" r:id="rId4"/>
+    <p:sldId id="259" r:id="rId5"/>
+    <p:sldId id="260" r:id="rId6"/>
+    <p:sldId id="261" r:id="rId7"/>
+    <p:sldId id="262" r:id="rId8"/>
+    <p:sldId id="263" r:id="rId9"/>
+    <p:sldId id="264" r:id="rId10"/>
+    <p:sldId id="265" r:id="rId11"/>
+    <p:sldId id="268" r:id="rId12"/>
+    <p:sldId id="266" r:id="rId13"/>
+    <p:sldId id="267" r:id="rId14"/>
+    <p:sldId id="269" r:id="rId15"/>
   </p:sldIdLst>
-  <p:sldSz cx="12188952" cy="6858000" type="screen4x3"/>
+  <p:sldSz cx="12188825" cy="6858000"/>
   <p:notesSz cx="6858000" cy="9144000"/>
   <p:defaultTextStyle>
     <a:defPPr>
@@ -112,6 +117,22 @@
       </a:defRPr>
     </a:lvl9pPr>
   </p:defaultTextStyle>
+  <p:extLst>
+    <p:ext uri="{EFAFB233-063F-42B5-8137-9DF3F51BA10A}">
+      <p15:sldGuideLst xmlns:p15="http://schemas.microsoft.com/office/powerpoint/2012/main">
+        <p15:guide id="1" orient="horz" pos="2160">
+          <p15:clr>
+            <a:srgbClr val="A4A3A4"/>
+          </p15:clr>
+        </p15:guide>
+        <p15:guide id="2" pos="2880">
+          <p15:clr>
+            <a:srgbClr val="A4A3A4"/>
+          </p15:clr>
+        </p15:guide>
+      </p15:sldGuideLst>
+    </p:ext>
+  </p:extLst>
 </p:presentation>
 </file>
 
@@ -153,10 +174,9 @@
           <a:lstStyle/>
           <a:p>
             <a:r>
-              <a:rPr lang="en-US" smtClean="0"/>
+              <a:rPr lang="en-US"/>
               <a:t>Click to edit Master title style</a:t>
             </a:r>
-            <a:endParaRPr lang="en-US"/>
           </a:p>
         </p:txBody>
       </p:sp>
@@ -272,10 +292,9 @@
           </a:lstStyle>
           <a:p>
             <a:r>
-              <a:rPr lang="en-US" smtClean="0"/>
+              <a:rPr lang="en-US"/>
               <a:t>Click to edit Master subtitle style</a:t>
             </a:r>
-            <a:endParaRPr lang="en-US"/>
           </a:p>
         </p:txBody>
       </p:sp>
@@ -296,7 +315,7 @@
           <a:p>
             <a:fld id="{5BCAD085-E8A6-8845-BD4E-CB4CCA059FC4}" type="datetimeFigureOut">
               <a:rPr lang="en-US" smtClean="0"/>
-              <a:t>1/27/13</a:t>
+              <a:t>4/23/2026</a:t>
             </a:fld>
             <a:endParaRPr lang="en-US"/>
           </a:p>
@@ -338,7 +357,7 @@
           <a:p>
             <a:fld id="{C1FF6DA9-008F-8B48-92A6-B652298478BF}" type="slidenum">
               <a:rPr lang="en-US" smtClean="0"/>
-              <a:t>‹#›</a:t>
+              <a:t>‹Nº›</a:t>
             </a:fld>
             <a:endParaRPr lang="en-US"/>
           </a:p>
@@ -390,10 +409,9 @@
           <a:lstStyle/>
           <a:p>
             <a:r>
-              <a:rPr lang="en-US" smtClean="0"/>
+              <a:rPr lang="en-US"/>
               <a:t>Click to edit Master title style</a:t>
             </a:r>
-            <a:endParaRPr lang="en-US"/>
           </a:p>
         </p:txBody>
       </p:sp>
@@ -414,38 +432,37 @@
           <a:p>
             <a:pPr lvl="0"/>
             <a:r>
-              <a:rPr lang="en-US" smtClean="0"/>
+              <a:rPr lang="en-US"/>
               <a:t>Click to edit Master text styles</a:t>
             </a:r>
           </a:p>
           <a:p>
             <a:pPr lvl="1"/>
             <a:r>
-              <a:rPr lang="en-US" smtClean="0"/>
+              <a:rPr lang="en-US"/>
               <a:t>Second level</a:t>
             </a:r>
           </a:p>
           <a:p>
             <a:pPr lvl="2"/>
             <a:r>
-              <a:rPr lang="en-US" smtClean="0"/>
+              <a:rPr lang="en-US"/>
               <a:t>Third level</a:t>
             </a:r>
           </a:p>
           <a:p>
             <a:pPr lvl="3"/>
             <a:r>
-              <a:rPr lang="en-US" smtClean="0"/>
+              <a:rPr lang="en-US"/>
               <a:t>Fourth level</a:t>
             </a:r>
           </a:p>
           <a:p>
             <a:pPr lvl="4"/>
             <a:r>
-              <a:rPr lang="en-US" smtClean="0"/>
+              <a:rPr lang="en-US"/>
               <a:t>Fifth level</a:t>
             </a:r>
-            <a:endParaRPr lang="en-US"/>
           </a:p>
         </p:txBody>
       </p:sp>
@@ -466,7 +483,7 @@
           <a:p>
             <a:fld id="{5BCAD085-E8A6-8845-BD4E-CB4CCA059FC4}" type="datetimeFigureOut">
               <a:rPr lang="en-US" smtClean="0"/>
-              <a:t>1/27/13</a:t>
+              <a:t>4/23/2026</a:t>
             </a:fld>
             <a:endParaRPr lang="en-US"/>
           </a:p>
@@ -508,7 +525,7 @@
           <a:p>
             <a:fld id="{C1FF6DA9-008F-8B48-92A6-B652298478BF}" type="slidenum">
               <a:rPr lang="en-US" smtClean="0"/>
-              <a:t>‹#›</a:t>
+              <a:t>‹Nº›</a:t>
             </a:fld>
             <a:endParaRPr lang="en-US"/>
           </a:p>
@@ -565,10 +582,9 @@
           <a:lstStyle/>
           <a:p>
             <a:r>
-              <a:rPr lang="en-US" smtClean="0"/>
+              <a:rPr lang="en-US"/>
               <a:t>Click to edit Master title style</a:t>
             </a:r>
-            <a:endParaRPr lang="en-US"/>
           </a:p>
         </p:txBody>
       </p:sp>
@@ -594,38 +610,37 @@
           <a:p>
             <a:pPr lvl="0"/>
             <a:r>
-              <a:rPr lang="en-US" smtClean="0"/>
+              <a:rPr lang="en-US"/>
               <a:t>Click to edit Master text styles</a:t>
             </a:r>
           </a:p>
           <a:p>
             <a:pPr lvl="1"/>
             <a:r>
-              <a:rPr lang="en-US" smtClean="0"/>
+              <a:rPr lang="en-US"/>
               <a:t>Second level</a:t>
             </a:r>
           </a:p>
           <a:p>
             <a:pPr lvl="2"/>
             <a:r>
-              <a:rPr lang="en-US" smtClean="0"/>
+              <a:rPr lang="en-US"/>
               <a:t>Third level</a:t>
             </a:r>
           </a:p>
           <a:p>
             <a:pPr lvl="3"/>
             <a:r>
-              <a:rPr lang="en-US" smtClean="0"/>
+              <a:rPr lang="en-US"/>
               <a:t>Fourth level</a:t>
             </a:r>
           </a:p>
           <a:p>
             <a:pPr lvl="4"/>
             <a:r>
-              <a:rPr lang="en-US" smtClean="0"/>
+              <a:rPr lang="en-US"/>
               <a:t>Fifth level</a:t>
             </a:r>
-            <a:endParaRPr lang="en-US"/>
           </a:p>
         </p:txBody>
       </p:sp>
@@ -646,7 +661,7 @@
           <a:p>
             <a:fld id="{5BCAD085-E8A6-8845-BD4E-CB4CCA059FC4}" type="datetimeFigureOut">
               <a:rPr lang="en-US" smtClean="0"/>
-              <a:t>1/27/13</a:t>
+              <a:t>4/23/2026</a:t>
             </a:fld>
             <a:endParaRPr lang="en-US"/>
           </a:p>
@@ -688,7 +703,7 @@
           <a:p>
             <a:fld id="{C1FF6DA9-008F-8B48-92A6-B652298478BF}" type="slidenum">
               <a:rPr lang="en-US" smtClean="0"/>
-              <a:t>‹#›</a:t>
+              <a:t>‹Nº›</a:t>
             </a:fld>
             <a:endParaRPr lang="en-US"/>
           </a:p>
@@ -740,10 +755,9 @@
           <a:lstStyle/>
           <a:p>
             <a:r>
-              <a:rPr lang="en-US" smtClean="0"/>
+              <a:rPr lang="en-US"/>
               <a:t>Click to edit Master title style</a:t>
             </a:r>
-            <a:endParaRPr lang="en-US"/>
           </a:p>
         </p:txBody>
       </p:sp>
@@ -764,38 +778,37 @@
           <a:p>
             <a:pPr lvl="0"/>
             <a:r>
-              <a:rPr lang="en-US" smtClean="0"/>
+              <a:rPr lang="en-US"/>
               <a:t>Click to edit Master text styles</a:t>
             </a:r>
           </a:p>
           <a:p>
             <a:pPr lvl="1"/>
             <a:r>
-              <a:rPr lang="en-US" smtClean="0"/>
+              <a:rPr lang="en-US"/>
               <a:t>Second level</a:t>
             </a:r>
           </a:p>
           <a:p>
             <a:pPr lvl="2"/>
             <a:r>
-              <a:rPr lang="en-US" smtClean="0"/>
+              <a:rPr lang="en-US"/>
               <a:t>Third level</a:t>
             </a:r>
           </a:p>
           <a:p>
             <a:pPr lvl="3"/>
             <a:r>
-              <a:rPr lang="en-US" smtClean="0"/>
+              <a:rPr lang="en-US"/>
               <a:t>Fourth level</a:t>
             </a:r>
           </a:p>
           <a:p>
             <a:pPr lvl="4"/>
             <a:r>
-              <a:rPr lang="en-US" smtClean="0"/>
+              <a:rPr lang="en-US"/>
               <a:t>Fifth level</a:t>
             </a:r>
-            <a:endParaRPr lang="en-US"/>
           </a:p>
         </p:txBody>
       </p:sp>
@@ -816,7 +829,7 @@
           <a:p>
             <a:fld id="{5BCAD085-E8A6-8845-BD4E-CB4CCA059FC4}" type="datetimeFigureOut">
               <a:rPr lang="en-US" smtClean="0"/>
-              <a:t>1/27/13</a:t>
+              <a:t>4/23/2026</a:t>
             </a:fld>
             <a:endParaRPr lang="en-US"/>
           </a:p>
@@ -858,7 +871,7 @@
           <a:p>
             <a:fld id="{C1FF6DA9-008F-8B48-92A6-B652298478BF}" type="slidenum">
               <a:rPr lang="en-US" smtClean="0"/>
-              <a:t>‹#›</a:t>
+              <a:t>‹Nº›</a:t>
             </a:fld>
             <a:endParaRPr lang="en-US"/>
           </a:p>
@@ -919,10 +932,9 @@
           </a:lstStyle>
           <a:p>
             <a:r>
-              <a:rPr lang="en-US" smtClean="0"/>
+              <a:rPr lang="en-US"/>
               <a:t>Click to edit Master title style</a:t>
             </a:r>
-            <a:endParaRPr lang="en-US"/>
           </a:p>
         </p:txBody>
       </p:sp>
@@ -1039,7 +1051,7 @@
           <a:p>
             <a:pPr lvl="0"/>
             <a:r>
-              <a:rPr lang="en-US" smtClean="0"/>
+              <a:rPr lang="en-US"/>
               <a:t>Click to edit Master text styles</a:t>
             </a:r>
           </a:p>
@@ -1062,7 +1074,7 @@
           <a:p>
             <a:fld id="{5BCAD085-E8A6-8845-BD4E-CB4CCA059FC4}" type="datetimeFigureOut">
               <a:rPr lang="en-US" smtClean="0"/>
-              <a:t>1/27/13</a:t>
+              <a:t>4/23/2026</a:t>
             </a:fld>
             <a:endParaRPr lang="en-US"/>
           </a:p>
@@ -1104,7 +1116,7 @@
           <a:p>
             <a:fld id="{C1FF6DA9-008F-8B48-92A6-B652298478BF}" type="slidenum">
               <a:rPr lang="en-US" smtClean="0"/>
-              <a:t>‹#›</a:t>
+              <a:t>‹Nº›</a:t>
             </a:fld>
             <a:endParaRPr lang="en-US"/>
           </a:p>
@@ -1156,10 +1168,9 @@
           <a:lstStyle/>
           <a:p>
             <a:r>
-              <a:rPr lang="en-US" smtClean="0"/>
+              <a:rPr lang="en-US"/>
               <a:t>Click to edit Master title style</a:t>
             </a:r>
-            <a:endParaRPr lang="en-US"/>
           </a:p>
         </p:txBody>
       </p:sp>
@@ -1213,38 +1224,37 @@
           <a:p>
             <a:pPr lvl="0"/>
             <a:r>
-              <a:rPr lang="en-US" smtClean="0"/>
+              <a:rPr lang="en-US"/>
               <a:t>Click to edit Master text styles</a:t>
             </a:r>
           </a:p>
           <a:p>
             <a:pPr lvl="1"/>
             <a:r>
-              <a:rPr lang="en-US" smtClean="0"/>
+              <a:rPr lang="en-US"/>
               <a:t>Second level</a:t>
             </a:r>
           </a:p>
           <a:p>
             <a:pPr lvl="2"/>
             <a:r>
-              <a:rPr lang="en-US" smtClean="0"/>
+              <a:rPr lang="en-US"/>
               <a:t>Third level</a:t>
             </a:r>
           </a:p>
           <a:p>
             <a:pPr lvl="3"/>
             <a:r>
-              <a:rPr lang="en-US" smtClean="0"/>
+              <a:rPr lang="en-US"/>
               <a:t>Fourth level</a:t>
             </a:r>
           </a:p>
           <a:p>
             <a:pPr lvl="4"/>
             <a:r>
-              <a:rPr lang="en-US" smtClean="0"/>
+              <a:rPr lang="en-US"/>
               <a:t>Fifth level</a:t>
             </a:r>
-            <a:endParaRPr lang="en-US"/>
           </a:p>
         </p:txBody>
       </p:sp>
@@ -1298,38 +1308,37 @@
           <a:p>
             <a:pPr lvl="0"/>
             <a:r>
-              <a:rPr lang="en-US" smtClean="0"/>
+              <a:rPr lang="en-US"/>
               <a:t>Click to edit Master text styles</a:t>
             </a:r>
           </a:p>
           <a:p>
             <a:pPr lvl="1"/>
             <a:r>
-              <a:rPr lang="en-US" smtClean="0"/>
+              <a:rPr lang="en-US"/>
               <a:t>Second level</a:t>
             </a:r>
           </a:p>
           <a:p>
             <a:pPr lvl="2"/>
             <a:r>
-              <a:rPr lang="en-US" smtClean="0"/>
+              <a:rPr lang="en-US"/>
               <a:t>Third level</a:t>
             </a:r>
           </a:p>
           <a:p>
             <a:pPr lvl="3"/>
             <a:r>
-              <a:rPr lang="en-US" smtClean="0"/>
+              <a:rPr lang="en-US"/>
               <a:t>Fourth level</a:t>
             </a:r>
           </a:p>
           <a:p>
             <a:pPr lvl="4"/>
             <a:r>
-              <a:rPr lang="en-US" smtClean="0"/>
+              <a:rPr lang="en-US"/>
               <a:t>Fifth level</a:t>
             </a:r>
-            <a:endParaRPr lang="en-US"/>
           </a:p>
         </p:txBody>
       </p:sp>
@@ -1350,7 +1359,7 @@
           <a:p>
             <a:fld id="{5BCAD085-E8A6-8845-BD4E-CB4CCA059FC4}" type="datetimeFigureOut">
               <a:rPr lang="en-US" smtClean="0"/>
-              <a:t>1/27/13</a:t>
+              <a:t>4/23/2026</a:t>
             </a:fld>
             <a:endParaRPr lang="en-US"/>
           </a:p>
@@ -1392,7 +1401,7 @@
           <a:p>
             <a:fld id="{C1FF6DA9-008F-8B48-92A6-B652298478BF}" type="slidenum">
               <a:rPr lang="en-US" smtClean="0"/>
-              <a:t>‹#›</a:t>
+              <a:t>‹Nº›</a:t>
             </a:fld>
             <a:endParaRPr lang="en-US"/>
           </a:p>
@@ -1448,10 +1457,9 @@
           </a:lstStyle>
           <a:p>
             <a:r>
-              <a:rPr lang="en-US" smtClean="0"/>
+              <a:rPr lang="en-US"/>
               <a:t>Click to edit Master title style</a:t>
             </a:r>
-            <a:endParaRPr lang="en-US"/>
           </a:p>
         </p:txBody>
       </p:sp>
@@ -1514,7 +1522,7 @@
           <a:p>
             <a:pPr lvl="0"/>
             <a:r>
-              <a:rPr lang="en-US" smtClean="0"/>
+              <a:rPr lang="en-US"/>
               <a:t>Click to edit Master text styles</a:t>
             </a:r>
           </a:p>
@@ -1570,38 +1578,37 @@
           <a:p>
             <a:pPr lvl="0"/>
             <a:r>
-              <a:rPr lang="en-US" smtClean="0"/>
+              <a:rPr lang="en-US"/>
               <a:t>Click to edit Master text styles</a:t>
             </a:r>
           </a:p>
           <a:p>
             <a:pPr lvl="1"/>
             <a:r>
-              <a:rPr lang="en-US" smtClean="0"/>
+              <a:rPr lang="en-US"/>
               <a:t>Second level</a:t>
             </a:r>
           </a:p>
           <a:p>
             <a:pPr lvl="2"/>
             <a:r>
-              <a:rPr lang="en-US" smtClean="0"/>
+              <a:rPr lang="en-US"/>
               <a:t>Third level</a:t>
             </a:r>
           </a:p>
           <a:p>
             <a:pPr lvl="3"/>
             <a:r>
-              <a:rPr lang="en-US" smtClean="0"/>
+              <a:rPr lang="en-US"/>
               <a:t>Fourth level</a:t>
             </a:r>
           </a:p>
           <a:p>
             <a:pPr lvl="4"/>
             <a:r>
-              <a:rPr lang="en-US" smtClean="0"/>
+              <a:rPr lang="en-US"/>
               <a:t>Fifth level</a:t>
             </a:r>
-            <a:endParaRPr lang="en-US"/>
           </a:p>
         </p:txBody>
       </p:sp>
@@ -1664,7 +1671,7 @@
           <a:p>
             <a:pPr lvl="0"/>
             <a:r>
-              <a:rPr lang="en-US" smtClean="0"/>
+              <a:rPr lang="en-US"/>
               <a:t>Click to edit Master text styles</a:t>
             </a:r>
           </a:p>
@@ -1720,38 +1727,37 @@
           <a:p>
             <a:pPr lvl="0"/>
             <a:r>
-              <a:rPr lang="en-US" smtClean="0"/>
+              <a:rPr lang="en-US"/>
               <a:t>Click to edit Master text styles</a:t>
             </a:r>
           </a:p>
           <a:p>
             <a:pPr lvl="1"/>
             <a:r>
-              <a:rPr lang="en-US" smtClean="0"/>
+              <a:rPr lang="en-US"/>
               <a:t>Second level</a:t>
             </a:r>
           </a:p>
           <a:p>
             <a:pPr lvl="2"/>
             <a:r>
-              <a:rPr lang="en-US" smtClean="0"/>
+              <a:rPr lang="en-US"/>
               <a:t>Third level</a:t>
             </a:r>
           </a:p>
           <a:p>
             <a:pPr lvl="3"/>
             <a:r>
-              <a:rPr lang="en-US" smtClean="0"/>
+              <a:rPr lang="en-US"/>
               <a:t>Fourth level</a:t>
             </a:r>
           </a:p>
           <a:p>
             <a:pPr lvl="4"/>
             <a:r>
-              <a:rPr lang="en-US" smtClean="0"/>
+              <a:rPr lang="en-US"/>
               <a:t>Fifth level</a:t>
             </a:r>
-            <a:endParaRPr lang="en-US"/>
           </a:p>
         </p:txBody>
       </p:sp>
@@ -1772,7 +1778,7 @@
           <a:p>
             <a:fld id="{5BCAD085-E8A6-8845-BD4E-CB4CCA059FC4}" type="datetimeFigureOut">
               <a:rPr lang="en-US" smtClean="0"/>
-              <a:t>1/27/13</a:t>
+              <a:t>4/23/2026</a:t>
             </a:fld>
             <a:endParaRPr lang="en-US"/>
           </a:p>
@@ -1814,7 +1820,7 @@
           <a:p>
             <a:fld id="{C1FF6DA9-008F-8B48-92A6-B652298478BF}" type="slidenum">
               <a:rPr lang="en-US" smtClean="0"/>
-              <a:t>‹#›</a:t>
+              <a:t>‹Nº›</a:t>
             </a:fld>
             <a:endParaRPr lang="en-US"/>
           </a:p>
@@ -1866,10 +1872,9 @@
           <a:lstStyle/>
           <a:p>
             <a:r>
-              <a:rPr lang="en-US" smtClean="0"/>
+              <a:rPr lang="en-US"/>
               <a:t>Click to edit Master title style</a:t>
             </a:r>
-            <a:endParaRPr lang="en-US"/>
           </a:p>
         </p:txBody>
       </p:sp>
@@ -1890,7 +1895,7 @@
           <a:p>
             <a:fld id="{5BCAD085-E8A6-8845-BD4E-CB4CCA059FC4}" type="datetimeFigureOut">
               <a:rPr lang="en-US" smtClean="0"/>
-              <a:t>1/27/13</a:t>
+              <a:t>4/23/2026</a:t>
             </a:fld>
             <a:endParaRPr lang="en-US"/>
           </a:p>
@@ -1932,7 +1937,7 @@
           <a:p>
             <a:fld id="{C1FF6DA9-008F-8B48-92A6-B652298478BF}" type="slidenum">
               <a:rPr lang="en-US" smtClean="0"/>
-              <a:t>‹#›</a:t>
+              <a:t>‹Nº›</a:t>
             </a:fld>
             <a:endParaRPr lang="en-US"/>
           </a:p>
@@ -1985,7 +1990,7 @@
           <a:p>
             <a:fld id="{5BCAD085-E8A6-8845-BD4E-CB4CCA059FC4}" type="datetimeFigureOut">
               <a:rPr lang="en-US" smtClean="0"/>
-              <a:t>1/27/13</a:t>
+              <a:t>4/23/2026</a:t>
             </a:fld>
             <a:endParaRPr lang="en-US"/>
           </a:p>
@@ -2027,7 +2032,7 @@
           <a:p>
             <a:fld id="{C1FF6DA9-008F-8B48-92A6-B652298478BF}" type="slidenum">
               <a:rPr lang="en-US" smtClean="0"/>
-              <a:t>‹#›</a:t>
+              <a:t>‹Nº›</a:t>
             </a:fld>
             <a:endParaRPr lang="en-US"/>
           </a:p>
@@ -2088,10 +2093,9 @@
           </a:lstStyle>
           <a:p>
             <a:r>
-              <a:rPr lang="en-US" smtClean="0"/>
+              <a:rPr lang="en-US"/>
               <a:t>Click to edit Master title style</a:t>
             </a:r>
-            <a:endParaRPr lang="en-US"/>
           </a:p>
         </p:txBody>
       </p:sp>
@@ -2145,38 +2149,37 @@
           <a:p>
             <a:pPr lvl="0"/>
             <a:r>
-              <a:rPr lang="en-US" smtClean="0"/>
+              <a:rPr lang="en-US"/>
               <a:t>Click to edit Master text styles</a:t>
             </a:r>
           </a:p>
           <a:p>
             <a:pPr lvl="1"/>
             <a:r>
-              <a:rPr lang="en-US" smtClean="0"/>
+              <a:rPr lang="en-US"/>
               <a:t>Second level</a:t>
             </a:r>
           </a:p>
           <a:p>
             <a:pPr lvl="2"/>
             <a:r>
-              <a:rPr lang="en-US" smtClean="0"/>
+              <a:rPr lang="en-US"/>
               <a:t>Third level</a:t>
             </a:r>
           </a:p>
           <a:p>
             <a:pPr lvl="3"/>
             <a:r>
-              <a:rPr lang="en-US" smtClean="0"/>
+              <a:rPr lang="en-US"/>
               <a:t>Fourth level</a:t>
             </a:r>
           </a:p>
           <a:p>
             <a:pPr lvl="4"/>
             <a:r>
-              <a:rPr lang="en-US" smtClean="0"/>
+              <a:rPr lang="en-US"/>
               <a:t>Fifth level</a:t>
             </a:r>
-            <a:endParaRPr lang="en-US"/>
           </a:p>
         </p:txBody>
       </p:sp>
@@ -2239,7 +2242,7 @@
           <a:p>
             <a:pPr lvl="0"/>
             <a:r>
-              <a:rPr lang="en-US" smtClean="0"/>
+              <a:rPr lang="en-US"/>
               <a:t>Click to edit Master text styles</a:t>
             </a:r>
           </a:p>
@@ -2262,7 +2265,7 @@
           <a:p>
             <a:fld id="{5BCAD085-E8A6-8845-BD4E-CB4CCA059FC4}" type="datetimeFigureOut">
               <a:rPr lang="en-US" smtClean="0"/>
-              <a:t>1/27/13</a:t>
+              <a:t>4/23/2026</a:t>
             </a:fld>
             <a:endParaRPr lang="en-US"/>
           </a:p>
@@ -2304,7 +2307,7 @@
           <a:p>
             <a:fld id="{C1FF6DA9-008F-8B48-92A6-B652298478BF}" type="slidenum">
               <a:rPr lang="en-US" smtClean="0"/>
-              <a:t>‹#›</a:t>
+              <a:t>‹Nº›</a:t>
             </a:fld>
             <a:endParaRPr lang="en-US"/>
           </a:p>
@@ -2365,10 +2368,9 @@
           </a:lstStyle>
           <a:p>
             <a:r>
-              <a:rPr lang="en-US" smtClean="0"/>
+              <a:rPr lang="en-US"/>
               <a:t>Click to edit Master title style</a:t>
             </a:r>
-            <a:endParaRPr lang="en-US"/>
           </a:p>
         </p:txBody>
       </p:sp>
@@ -2492,7 +2494,7 @@
           <a:p>
             <a:pPr lvl="0"/>
             <a:r>
-              <a:rPr lang="en-US" smtClean="0"/>
+              <a:rPr lang="en-US"/>
               <a:t>Click to edit Master text styles</a:t>
             </a:r>
           </a:p>
@@ -2515,7 +2517,7 @@
           <a:p>
             <a:fld id="{5BCAD085-E8A6-8845-BD4E-CB4CCA059FC4}" type="datetimeFigureOut">
               <a:rPr lang="en-US" smtClean="0"/>
-              <a:t>1/27/13</a:t>
+              <a:t>4/23/2026</a:t>
             </a:fld>
             <a:endParaRPr lang="en-US"/>
           </a:p>
@@ -2557,7 +2559,7 @@
           <a:p>
             <a:fld id="{C1FF6DA9-008F-8B48-92A6-B652298478BF}" type="slidenum">
               <a:rPr lang="en-US" smtClean="0"/>
-              <a:t>‹#›</a:t>
+              <a:t>‹Nº›</a:t>
             </a:fld>
             <a:endParaRPr lang="en-US"/>
           </a:p>
@@ -2624,10 +2626,9 @@
           <a:lstStyle/>
           <a:p>
             <a:r>
-              <a:rPr lang="en-US" smtClean="0"/>
+              <a:rPr lang="en-US"/>
               <a:t>Click to edit Master title style</a:t>
             </a:r>
-            <a:endParaRPr lang="en-US"/>
           </a:p>
         </p:txBody>
       </p:sp>
@@ -2658,38 +2659,37 @@
           <a:p>
             <a:pPr lvl="0"/>
             <a:r>
-              <a:rPr lang="en-US" smtClean="0"/>
+              <a:rPr lang="en-US"/>
               <a:t>Click to edit Master text styles</a:t>
             </a:r>
           </a:p>
           <a:p>
             <a:pPr lvl="1"/>
             <a:r>
-              <a:rPr lang="en-US" smtClean="0"/>
+              <a:rPr lang="en-US"/>
               <a:t>Second level</a:t>
             </a:r>
           </a:p>
           <a:p>
             <a:pPr lvl="2"/>
             <a:r>
-              <a:rPr lang="en-US" smtClean="0"/>
+              <a:rPr lang="en-US"/>
               <a:t>Third level</a:t>
             </a:r>
           </a:p>
           <a:p>
             <a:pPr lvl="3"/>
             <a:r>
-              <a:rPr lang="en-US" smtClean="0"/>
+              <a:rPr lang="en-US"/>
               <a:t>Fourth level</a:t>
             </a:r>
           </a:p>
           <a:p>
             <a:pPr lvl="4"/>
             <a:r>
-              <a:rPr lang="en-US" smtClean="0"/>
+              <a:rPr lang="en-US"/>
               <a:t>Fifth level</a:t>
             </a:r>
-            <a:endParaRPr lang="en-US"/>
           </a:p>
         </p:txBody>
       </p:sp>
@@ -2728,7 +2728,7 @@
           <a:p>
             <a:fld id="{5BCAD085-E8A6-8845-BD4E-CB4CCA059FC4}" type="datetimeFigureOut">
               <a:rPr lang="en-US" smtClean="0"/>
-              <a:t>1/27/13</a:t>
+              <a:t>4/23/2026</a:t>
             </a:fld>
             <a:endParaRPr lang="en-US"/>
           </a:p>
@@ -2806,7 +2806,7 @@
           <a:p>
             <a:fld id="{C1FF6DA9-008F-8B48-92A6-B652298478BF}" type="slidenum">
               <a:rPr lang="en-US" smtClean="0"/>
-              <a:t>‹#›</a:t>
+              <a:t>‹Nº›</a:t>
             </a:fld>
             <a:endParaRPr lang="en-US"/>
           </a:p>
@@ -3087,7 +3087,7 @@
 </file>
 
 <file path=ppt/slides/slide1.xml><?xml version="1.0" encoding="utf-8"?>
-<p:sld xmlns:a="http://schemas.openxmlformats.org/drawingml/2006/main" xmlns:p="http://schemas.openxmlformats.org/presentationml/2006/main" xmlns:r="http://schemas.openxmlformats.org/officeDocument/2006/relationships">
+<p:sld xmlns:a="http://schemas.openxmlformats.org/drawingml/2006/main" xmlns:r="http://schemas.openxmlformats.org/officeDocument/2006/relationships" xmlns:p="http://schemas.openxmlformats.org/presentationml/2006/main">
   <p:cSld>
     <p:spTree>
       <p:nvGrpSpPr>
@@ -3095,7 +3095,14 @@
         <p:cNvGrpSpPr/>
         <p:nvPr/>
       </p:nvGrpSpPr>
-      <p:grpSpPr/>
+      <p:grpSpPr>
+        <a:xfrm>
+          <a:off x="0" y="0"/>
+          <a:ext cx="0" cy="0"/>
+          <a:chOff x="0" y="0"/>
+          <a:chExt cx="0" cy="0"/>
+        </a:xfrm>
+      </p:grpSpPr>
       <p:sp>
         <p:nvSpPr>
           <p:cNvPr id="2" name="Rectangle 1"/>
@@ -3136,6 +3143,7 @@
           <a:lstStyle/>
           <a:p>
             <a:pPr algn="ctr"/>
+            <a:endParaRPr/>
           </a:p>
         </p:txBody>
       </p:sp>
@@ -3179,6 +3187,7 @@
           <a:lstStyle/>
           <a:p>
             <a:pPr algn="ctr"/>
+            <a:endParaRPr/>
           </a:p>
         </p:txBody>
       </p:sp>
@@ -3296,8 +3305,8 @@
 </p:sld>
 </file>
 
-<file path=ppt/slides/slide2.xml><?xml version="1.0" encoding="utf-8"?>
-<p:sld xmlns:a="http://schemas.openxmlformats.org/drawingml/2006/main" xmlns:p="http://schemas.openxmlformats.org/presentationml/2006/main" xmlns:r="http://schemas.openxmlformats.org/officeDocument/2006/relationships">
+<file path=ppt/slides/slide10.xml><?xml version="1.0" encoding="utf-8"?>
+<p:sld xmlns:a="http://schemas.openxmlformats.org/drawingml/2006/main" xmlns:r="http://schemas.openxmlformats.org/officeDocument/2006/relationships" xmlns:p="http://schemas.openxmlformats.org/presentationml/2006/main">
   <p:cSld>
     <p:spTree>
       <p:nvGrpSpPr>
@@ -3305,7 +3314,14 @@
         <p:cNvGrpSpPr/>
         <p:nvPr/>
       </p:nvGrpSpPr>
-      <p:grpSpPr/>
+      <p:grpSpPr>
+        <a:xfrm>
+          <a:off x="0" y="0"/>
+          <a:ext cx="0" cy="0"/>
+          <a:chOff x="0" y="0"/>
+          <a:chExt cx="0" cy="0"/>
+        </a:xfrm>
+      </p:grpSpPr>
       <p:sp>
         <p:nvSpPr>
           <p:cNvPr id="2" name="Rectangle 1"/>
@@ -3346,6 +3362,7 @@
           <a:lstStyle/>
           <a:p>
             <a:pPr algn="ctr"/>
+            <a:endParaRPr/>
           </a:p>
         </p:txBody>
       </p:sp>
@@ -3378,7 +3395,7 @@
               </a:defRPr>
             </a:pPr>
             <a:r>
-              <a:t>Metodologia: de la idea al proyecto</a:t>
+              <a:t>Respuestas al debate de cierre</a:t>
             </a:r>
           </a:p>
         </p:txBody>
@@ -3423,6 +3440,7 @@
           <a:lstStyle/>
           <a:p>
             <a:pPr algn="ctr"/>
+            <a:endParaRPr/>
           </a:p>
         </p:txBody>
       </p:sp>
@@ -3435,7 +3453,7 @@
         <p:spPr>
           <a:xfrm>
             <a:off x="640080" y="1280160"/>
-            <a:ext cx="10515600" cy="5029200"/>
+            <a:ext cx="10515600" cy="4401205"/>
           </a:xfrm>
           <a:prstGeom prst="rect">
             <a:avLst/>
@@ -3460,7 +3478,195 @@
               </a:defRPr>
             </a:pPr>
             <a:r>
-              <a:t>1. Identificar el problema (dia 2): ¿que duele? ¿a quien? ¿cuanto cuesta?</a:t>
+              <a:rPr dirty="0"/>
+              <a:t>1. Lo mas </a:t>
+            </a:r>
+            <a:r>
+              <a:rPr dirty="0" err="1"/>
+              <a:t>sorprendente</a:t>
+            </a:r>
+            <a:r>
+              <a:rPr dirty="0"/>
+              <a:t> del modulo:</a:t>
+            </a:r>
+          </a:p>
+          <a:p>
+            <a:pPr lvl="1">
+              <a:spcAft>
+                <a:spcPts val="400"/>
+              </a:spcAft>
+              <a:defRPr sz="1700">
+                <a:solidFill>
+                  <a:srgbClr val="666666"/>
+                </a:solidFill>
+                <a:latin typeface="Calibri"/>
+              </a:defRPr>
+            </a:pPr>
+            <a:r>
+              <a:rPr dirty="0"/>
+              <a:t>    </a:t>
+            </a:r>
+            <a:r>
+              <a:rPr dirty="0" err="1"/>
+              <a:t>Normalmente</a:t>
+            </a:r>
+            <a:r>
+              <a:rPr dirty="0"/>
+              <a:t>: </a:t>
+            </a:r>
+            <a:r>
+              <a:rPr dirty="0" err="1"/>
+              <a:t>que</a:t>
+            </a:r>
+            <a:r>
+              <a:rPr dirty="0"/>
+              <a:t> la </a:t>
+            </a:r>
+            <a:r>
+              <a:rPr dirty="0" err="1"/>
+              <a:t>mayoria</a:t>
+            </a:r>
+            <a:r>
+              <a:rPr dirty="0"/>
+              <a:t> de </a:t>
+            </a:r>
+            <a:r>
+              <a:rPr dirty="0" err="1"/>
+              <a:t>fracasos</a:t>
+            </a:r>
+            <a:r>
+              <a:rPr dirty="0"/>
+              <a:t> NO son </a:t>
+            </a:r>
+            <a:r>
+              <a:rPr dirty="0" err="1"/>
+              <a:t>por</a:t>
+            </a:r>
+            <a:r>
+              <a:rPr dirty="0"/>
+              <a:t> </a:t>
+            </a:r>
+            <a:r>
+              <a:rPr dirty="0" err="1"/>
+              <a:t>tecnologia</a:t>
+            </a:r>
+            <a:r>
+              <a:rPr dirty="0"/>
+              <a:t>.</a:t>
+            </a:r>
+          </a:p>
+          <a:p>
+            <a:pPr lvl="1">
+              <a:spcAft>
+                <a:spcPts val="400"/>
+              </a:spcAft>
+              <a:defRPr sz="1700">
+                <a:solidFill>
+                  <a:srgbClr val="666666"/>
+                </a:solidFill>
+                <a:latin typeface="Calibri"/>
+              </a:defRPr>
+            </a:pPr>
+            <a:r>
+              <a:rPr dirty="0"/>
+              <a:t>    Son </a:t>
+            </a:r>
+            <a:r>
+              <a:rPr dirty="0" err="1"/>
+              <a:t>por</a:t>
+            </a:r>
+            <a:r>
+              <a:rPr dirty="0"/>
+              <a:t> </a:t>
+            </a:r>
+            <a:r>
+              <a:rPr dirty="0" err="1"/>
+              <a:t>gobernanza</a:t>
+            </a:r>
+            <a:r>
+              <a:rPr dirty="0"/>
+              <a:t>, </a:t>
+            </a:r>
+            <a:r>
+              <a:rPr dirty="0" err="1"/>
+              <a:t>incentivos</a:t>
+            </a:r>
+            <a:r>
+              <a:rPr dirty="0"/>
+              <a:t>, </a:t>
+            </a:r>
+            <a:r>
+              <a:rPr dirty="0" err="1"/>
+              <a:t>regulacion</a:t>
+            </a:r>
+            <a:r>
+              <a:rPr dirty="0"/>
+              <a:t> o UX.</a:t>
+            </a:r>
+          </a:p>
+          <a:p>
+            <a:pPr lvl="1">
+              <a:spcAft>
+                <a:spcPts val="400"/>
+              </a:spcAft>
+              <a:defRPr sz="1700">
+                <a:solidFill>
+                  <a:srgbClr val="666666"/>
+                </a:solidFill>
+                <a:latin typeface="Calibri"/>
+              </a:defRPr>
+            </a:pPr>
+            <a:r>
+              <a:rPr dirty="0"/>
+              <a:t>    La </a:t>
+            </a:r>
+            <a:r>
+              <a:rPr dirty="0" err="1"/>
+              <a:t>tecnologia</a:t>
+            </a:r>
+            <a:r>
+              <a:rPr dirty="0"/>
+              <a:t> Fabric </a:t>
+            </a:r>
+            <a:r>
+              <a:rPr dirty="0" err="1"/>
+              <a:t>funciona</a:t>
+            </a:r>
+            <a:r>
+              <a:rPr dirty="0"/>
+              <a:t> — </a:t>
+            </a:r>
+            <a:r>
+              <a:rPr dirty="0" err="1"/>
+              <a:t>el</a:t>
+            </a:r>
+            <a:r>
+              <a:rPr dirty="0"/>
+              <a:t> </a:t>
+            </a:r>
+            <a:r>
+              <a:rPr dirty="0" err="1"/>
+              <a:t>problema</a:t>
+            </a:r>
+            <a:r>
+              <a:rPr dirty="0"/>
+              <a:t> es </a:t>
+            </a:r>
+            <a:r>
+              <a:rPr dirty="0" err="1"/>
+              <a:t>el</a:t>
+            </a:r>
+            <a:r>
+              <a:rPr dirty="0"/>
+              <a:t> </a:t>
+            </a:r>
+            <a:r>
+              <a:rPr dirty="0" err="1"/>
+              <a:t>contexto</a:t>
+            </a:r>
+            <a:r>
+              <a:rPr dirty="0"/>
+              <a:t>.</a:t>
             </a:r>
           </a:p>
           <a:p>
@@ -3476,7 +3682,244 @@
               </a:defRPr>
             </a:pPr>
             <a:r>
-              <a:t>2. Validar que blockchain aporta (dia 1): arbol de decision</a:t>
+              <a:rPr dirty="0"/>
+              <a:t>2. ¿Han </a:t>
+            </a:r>
+            <a:r>
+              <a:rPr dirty="0" err="1"/>
+              <a:t>cambiado</a:t>
+            </a:r>
+            <a:r>
+              <a:rPr dirty="0"/>
+              <a:t> de opinion </a:t>
+            </a:r>
+            <a:r>
+              <a:rPr dirty="0" err="1"/>
+              <a:t>sobre</a:t>
+            </a:r>
+            <a:r>
+              <a:rPr dirty="0"/>
+              <a:t> blockchain enterprise?</a:t>
+            </a:r>
+          </a:p>
+          <a:p>
+            <a:pPr lvl="1">
+              <a:spcAft>
+                <a:spcPts val="400"/>
+              </a:spcAft>
+              <a:defRPr sz="1700">
+                <a:solidFill>
+                  <a:srgbClr val="666666"/>
+                </a:solidFill>
+                <a:latin typeface="Calibri"/>
+              </a:defRPr>
+            </a:pPr>
+            <a:r>
+              <a:rPr dirty="0"/>
+              <a:t>    </a:t>
+            </a:r>
+            <a:r>
+              <a:rPr dirty="0" err="1"/>
+              <a:t>Depende</a:t>
+            </a:r>
+            <a:r>
+              <a:rPr dirty="0"/>
+              <a:t> del </a:t>
+            </a:r>
+            <a:r>
+              <a:rPr dirty="0" err="1"/>
+              <a:t>alumno</a:t>
+            </a:r>
+            <a:r>
+              <a:rPr dirty="0"/>
+              <a:t>, </a:t>
+            </a:r>
+            <a:r>
+              <a:rPr dirty="0" err="1"/>
+              <a:t>pero</a:t>
+            </a:r>
+            <a:r>
+              <a:rPr dirty="0"/>
+              <a:t> patron </a:t>
+            </a:r>
+            <a:r>
+              <a:rPr dirty="0" err="1"/>
+              <a:t>comun</a:t>
+            </a:r>
+            <a:r>
+              <a:rPr dirty="0"/>
+              <a:t>:</a:t>
+            </a:r>
+          </a:p>
+          <a:p>
+            <a:pPr lvl="1">
+              <a:spcAft>
+                <a:spcPts val="400"/>
+              </a:spcAft>
+              <a:defRPr sz="1700">
+                <a:solidFill>
+                  <a:srgbClr val="666666"/>
+                </a:solidFill>
+                <a:latin typeface="Calibri"/>
+              </a:defRPr>
+            </a:pPr>
+            <a:r>
+              <a:rPr dirty="0"/>
+              <a:t>      - De '</a:t>
+            </a:r>
+            <a:r>
+              <a:rPr dirty="0" err="1"/>
+              <a:t>revolucionario</a:t>
+            </a:r>
+            <a:r>
+              <a:rPr dirty="0"/>
+              <a:t>' a 'util </a:t>
+            </a:r>
+            <a:r>
+              <a:rPr dirty="0" err="1"/>
+              <a:t>en</a:t>
+            </a:r>
+            <a:r>
+              <a:rPr dirty="0"/>
+              <a:t> </a:t>
+            </a:r>
+            <a:r>
+              <a:rPr dirty="0" err="1"/>
+              <a:t>ciertos</a:t>
+            </a:r>
+            <a:r>
+              <a:rPr dirty="0"/>
+              <a:t> </a:t>
+            </a:r>
+            <a:r>
+              <a:rPr dirty="0" err="1"/>
+              <a:t>casos</a:t>
+            </a:r>
+            <a:r>
+              <a:rPr dirty="0"/>
+              <a:t> </a:t>
+            </a:r>
+            <a:r>
+              <a:rPr dirty="0" err="1"/>
+              <a:t>concretos</a:t>
+            </a:r>
+            <a:r>
+              <a:rPr dirty="0"/>
+              <a:t>'.</a:t>
+            </a:r>
+          </a:p>
+          <a:p>
+            <a:pPr lvl="1">
+              <a:spcAft>
+                <a:spcPts val="400"/>
+              </a:spcAft>
+              <a:defRPr sz="1700">
+                <a:solidFill>
+                  <a:srgbClr val="666666"/>
+                </a:solidFill>
+                <a:latin typeface="Calibri"/>
+              </a:defRPr>
+            </a:pPr>
+            <a:r>
+              <a:rPr dirty="0"/>
+              <a:t>      - De '</a:t>
+            </a:r>
+            <a:r>
+              <a:rPr dirty="0" err="1"/>
+              <a:t>solucion</a:t>
+            </a:r>
+            <a:r>
+              <a:rPr dirty="0"/>
+              <a:t> a </a:t>
+            </a:r>
+            <a:r>
+              <a:rPr dirty="0" err="1"/>
+              <a:t>todo</a:t>
+            </a:r>
+            <a:r>
+              <a:rPr dirty="0"/>
+              <a:t>' a '</a:t>
+            </a:r>
+            <a:r>
+              <a:rPr dirty="0" err="1"/>
+              <a:t>herramienta</a:t>
+            </a:r>
+            <a:r>
+              <a:rPr dirty="0"/>
+              <a:t> para </a:t>
+            </a:r>
+            <a:r>
+              <a:rPr dirty="0" err="1"/>
+              <a:t>problemas</a:t>
+            </a:r>
+            <a:r>
+              <a:rPr dirty="0"/>
+              <a:t> </a:t>
+            </a:r>
+            <a:r>
+              <a:rPr dirty="0" err="1"/>
+              <a:t>especificos</a:t>
+            </a:r>
+            <a:r>
+              <a:rPr dirty="0"/>
+              <a:t>'.</a:t>
+            </a:r>
+          </a:p>
+          <a:p>
+            <a:pPr lvl="1">
+              <a:spcAft>
+                <a:spcPts val="400"/>
+              </a:spcAft>
+              <a:defRPr sz="1700">
+                <a:solidFill>
+                  <a:srgbClr val="666666"/>
+                </a:solidFill>
+                <a:latin typeface="Calibri"/>
+              </a:defRPr>
+            </a:pPr>
+            <a:r>
+              <a:rPr dirty="0"/>
+              <a:t>      - Muchos </a:t>
+            </a:r>
+            <a:r>
+              <a:rPr dirty="0" err="1"/>
+              <a:t>empiezan</a:t>
+            </a:r>
+            <a:r>
+              <a:rPr dirty="0"/>
+              <a:t> </a:t>
+            </a:r>
+            <a:r>
+              <a:rPr dirty="0" err="1"/>
+              <a:t>esceptico</a:t>
+            </a:r>
+            <a:r>
+              <a:rPr dirty="0"/>
+              <a:t> con </a:t>
+            </a:r>
+            <a:r>
+              <a:rPr dirty="0" err="1"/>
+              <a:t>cripto</a:t>
+            </a:r>
+            <a:r>
+              <a:rPr dirty="0"/>
+              <a:t> y </a:t>
+            </a:r>
+            <a:r>
+              <a:rPr dirty="0" err="1"/>
+              <a:t>terminan</a:t>
+            </a:r>
+            <a:r>
+              <a:rPr dirty="0"/>
+              <a:t> </a:t>
+            </a:r>
+            <a:r>
+              <a:rPr dirty="0" err="1"/>
+              <a:t>valorando</a:t>
+            </a:r>
+            <a:r>
+              <a:rPr dirty="0"/>
+              <a:t> enterprise.</a:t>
             </a:r>
           </a:p>
           <a:p>
@@ -3492,71 +3935,195 @@
               </a:defRPr>
             </a:pPr>
             <a:r>
-              <a:t>3. Definir el consorcio: quienes participan, que rol tiene cada uno</a:t>
-            </a:r>
-          </a:p>
-          <a:p>
-            <a:pPr>
-              <a:spcAft>
-                <a:spcPts val="800"/>
-              </a:spcAft>
-              <a:defRPr sz="2000">
-                <a:solidFill>
-                  <a:srgbClr val="333333"/>
-                </a:solidFill>
-                <a:latin typeface="Calibri"/>
-              </a:defRPr>
-            </a:pPr>
-            <a:r>
-              <a:t>4. Disenar la gobernanza (dia 3): politicas, costes, onboarding</a:t>
-            </a:r>
-          </a:p>
-          <a:p>
-            <a:pPr>
-              <a:spcAft>
-                <a:spcPts val="800"/>
-              </a:spcAft>
-              <a:defRPr sz="2000">
-                <a:solidFill>
-                  <a:srgbClr val="333333"/>
-                </a:solidFill>
-                <a:latin typeface="Calibri"/>
-              </a:defRPr>
-            </a:pPr>
-            <a:r>
-              <a:t>5. Disenar la red Fabric: organizaciones, canales, datos</a:t>
-            </a:r>
-          </a:p>
-          <a:p>
-            <a:pPr>
-              <a:spcAft>
-                <a:spcPts val="800"/>
-              </a:spcAft>
-              <a:defRPr sz="2000">
-                <a:solidFill>
-                  <a:srgbClr val="333333"/>
-                </a:solidFill>
-                <a:latin typeface="Calibri"/>
-              </a:defRPr>
-            </a:pPr>
-            <a:r>
-              <a:t>6. Definir el MVP: empezar pequeno, demostrar valor</a:t>
-            </a:r>
-          </a:p>
-          <a:p>
-            <a:pPr>
-              <a:spcAft>
-                <a:spcPts val="800"/>
-              </a:spcAft>
-              <a:defRPr sz="2000">
-                <a:solidFill>
-                  <a:srgbClr val="333333"/>
-                </a:solidFill>
-                <a:latin typeface="Calibri"/>
-              </a:defRPr>
-            </a:pPr>
-            <a:r>
-              <a:t>7. Planificar: roadmap, equipo, presupuesto, riesgos</a:t>
+              <a:rPr dirty="0"/>
+              <a:t>3. </a:t>
+            </a:r>
+            <a:r>
+              <a:rPr dirty="0" err="1"/>
+              <a:t>Oportunidades</a:t>
+            </a:r>
+            <a:r>
+              <a:rPr dirty="0"/>
+              <a:t> </a:t>
+            </a:r>
+            <a:r>
+              <a:rPr dirty="0" err="1"/>
+              <a:t>en</a:t>
+            </a:r>
+            <a:r>
+              <a:rPr dirty="0"/>
+              <a:t> </a:t>
+            </a:r>
+            <a:r>
+              <a:rPr dirty="0" err="1"/>
+              <a:t>vuestro</a:t>
+            </a:r>
+            <a:r>
+              <a:rPr dirty="0"/>
+              <a:t> sector:</a:t>
+            </a:r>
+          </a:p>
+          <a:p>
+            <a:pPr lvl="1">
+              <a:spcAft>
+                <a:spcPts val="400"/>
+              </a:spcAft>
+              <a:defRPr sz="1700">
+                <a:solidFill>
+                  <a:srgbClr val="666666"/>
+                </a:solidFill>
+                <a:latin typeface="Calibri"/>
+              </a:defRPr>
+            </a:pPr>
+            <a:r>
+              <a:rPr dirty="0"/>
+              <a:t>    Sin </a:t>
+            </a:r>
+            <a:r>
+              <a:rPr dirty="0" err="1"/>
+              <a:t>respuesta</a:t>
+            </a:r>
+            <a:r>
+              <a:rPr dirty="0"/>
+              <a:t> unica — </a:t>
+            </a:r>
+            <a:r>
+              <a:rPr dirty="0" err="1"/>
+              <a:t>depende</a:t>
+            </a:r>
+            <a:r>
+              <a:rPr dirty="0"/>
+              <a:t> del sector de </a:t>
+            </a:r>
+            <a:r>
+              <a:rPr dirty="0" err="1"/>
+              <a:t>cada</a:t>
+            </a:r>
+            <a:r>
+              <a:rPr dirty="0"/>
+              <a:t> </a:t>
+            </a:r>
+            <a:r>
+              <a:rPr dirty="0" err="1"/>
+              <a:t>alumno</a:t>
+            </a:r>
+            <a:r>
+              <a:rPr dirty="0"/>
+              <a:t>.</a:t>
+            </a:r>
+          </a:p>
+          <a:p>
+            <a:pPr lvl="1">
+              <a:spcAft>
+                <a:spcPts val="400"/>
+              </a:spcAft>
+              <a:defRPr sz="1700">
+                <a:solidFill>
+                  <a:srgbClr val="666666"/>
+                </a:solidFill>
+                <a:latin typeface="Calibri"/>
+              </a:defRPr>
+            </a:pPr>
+            <a:r>
+              <a:rPr dirty="0"/>
+              <a:t>    </a:t>
+            </a:r>
+            <a:r>
+              <a:rPr dirty="0" err="1"/>
+              <a:t>Preguntas</a:t>
+            </a:r>
+            <a:r>
+              <a:rPr dirty="0"/>
+              <a:t> </a:t>
+            </a:r>
+            <a:r>
+              <a:rPr dirty="0" err="1"/>
+              <a:t>guia</a:t>
+            </a:r>
+            <a:r>
+              <a:rPr dirty="0"/>
+              <a:t>: ¿</a:t>
+            </a:r>
+            <a:r>
+              <a:rPr dirty="0" err="1"/>
+              <a:t>tenemos</a:t>
+            </a:r>
+            <a:r>
+              <a:rPr dirty="0"/>
+              <a:t> multiples </a:t>
+            </a:r>
+            <a:r>
+              <a:rPr dirty="0" err="1"/>
+              <a:t>actores</a:t>
+            </a:r>
+            <a:r>
+              <a:rPr dirty="0"/>
+              <a:t> con </a:t>
+            </a:r>
+            <a:r>
+              <a:rPr dirty="0" err="1"/>
+              <a:t>desconfianza</a:t>
+            </a:r>
+            <a:r>
+              <a:rPr dirty="0"/>
+              <a:t>? ¿</a:t>
+            </a:r>
+            <a:r>
+              <a:rPr dirty="0" err="1"/>
+              <a:t>trazabilidad</a:t>
+            </a:r>
+            <a:r>
+              <a:rPr dirty="0"/>
+              <a:t>?</a:t>
+            </a:r>
+          </a:p>
+          <a:p>
+            <a:pPr lvl="1">
+              <a:spcAft>
+                <a:spcPts val="400"/>
+              </a:spcAft>
+              <a:defRPr sz="1700">
+                <a:solidFill>
+                  <a:srgbClr val="666666"/>
+                </a:solidFill>
+                <a:latin typeface="Calibri"/>
+              </a:defRPr>
+            </a:pPr>
+            <a:r>
+              <a:rPr dirty="0"/>
+              <a:t>    Si la </a:t>
+            </a:r>
+            <a:r>
+              <a:rPr dirty="0" err="1"/>
+              <a:t>respuesta</a:t>
+            </a:r>
+            <a:r>
+              <a:rPr dirty="0"/>
+              <a:t> es </a:t>
+            </a:r>
+            <a:r>
+              <a:rPr dirty="0" err="1"/>
+              <a:t>si</a:t>
+            </a:r>
+            <a:r>
+              <a:rPr dirty="0"/>
+              <a:t> a ambas, </a:t>
+            </a:r>
+            <a:r>
+              <a:rPr dirty="0" err="1"/>
+              <a:t>probablemente</a:t>
+            </a:r>
+            <a:r>
+              <a:rPr dirty="0"/>
+              <a:t> </a:t>
+            </a:r>
+            <a:r>
+              <a:rPr dirty="0" err="1"/>
+              <a:t>si</a:t>
+            </a:r>
+            <a:r>
+              <a:rPr dirty="0"/>
+              <a:t>.</a:t>
             </a:r>
           </a:p>
         </p:txBody>
@@ -3569,19 +4136,38 @@
 </p:sld>
 </file>
 
-<file path=ppt/slides/slide3.xml><?xml version="1.0" encoding="utf-8"?>
-<p:sld xmlns:a="http://schemas.openxmlformats.org/drawingml/2006/main" xmlns:p="http://schemas.openxmlformats.org/presentationml/2006/main" xmlns:r="http://schemas.openxmlformats.org/officeDocument/2006/relationships">
+<file path=ppt/slides/slide11.xml><?xml version="1.0" encoding="utf-8"?>
+<p:sld xmlns:a="http://schemas.openxmlformats.org/drawingml/2006/main" xmlns:r="http://schemas.openxmlformats.org/officeDocument/2006/relationships" xmlns:p="http://schemas.openxmlformats.org/presentationml/2006/main">
   <p:cSld>
     <p:spTree>
       <p:nvGrpSpPr>
-        <p:cNvPr id="1" name=""/>
+        <p:cNvPr id="1" name="">
+          <a:extLst>
+            <a:ext uri="{FF2B5EF4-FFF2-40B4-BE49-F238E27FC236}">
+              <a16:creationId xmlns:a16="http://schemas.microsoft.com/office/drawing/2014/main" id="{B6288CA2-9CC6-E11F-E7BD-7D6419427D83}"/>
+            </a:ext>
+          </a:extLst>
+        </p:cNvPr>
         <p:cNvGrpSpPr/>
         <p:nvPr/>
       </p:nvGrpSpPr>
-      <p:grpSpPr/>
-      <p:sp>
-        <p:nvSpPr>
-          <p:cNvPr id="2" name="Rectangle 1"/>
+      <p:grpSpPr>
+        <a:xfrm>
+          <a:off x="0" y="0"/>
+          <a:ext cx="0" cy="0"/>
+          <a:chOff x="0" y="0"/>
+          <a:chExt cx="0" cy="0"/>
+        </a:xfrm>
+      </p:grpSpPr>
+      <p:sp>
+        <p:nvSpPr>
+          <p:cNvPr id="2" name="Rectangle 1">
+            <a:extLst>
+              <a:ext uri="{FF2B5EF4-FFF2-40B4-BE49-F238E27FC236}">
+                <a16:creationId xmlns:a16="http://schemas.microsoft.com/office/drawing/2014/main" id="{456BEC58-AF77-A230-5839-1CA234EF5693}"/>
+              </a:ext>
+            </a:extLst>
+          </p:cNvPr>
           <p:cNvSpPr/>
           <p:nvPr/>
         </p:nvSpPr>
@@ -3619,12 +4205,19 @@
           <a:lstStyle/>
           <a:p>
             <a:pPr algn="ctr"/>
-          </a:p>
-        </p:txBody>
-      </p:sp>
-      <p:sp>
-        <p:nvSpPr>
-          <p:cNvPr id="3" name="TextBox 2"/>
+            <a:endParaRPr/>
+          </a:p>
+        </p:txBody>
+      </p:sp>
+      <p:sp>
+        <p:nvSpPr>
+          <p:cNvPr id="3" name="TextBox 2">
+            <a:extLst>
+              <a:ext uri="{FF2B5EF4-FFF2-40B4-BE49-F238E27FC236}">
+                <a16:creationId xmlns:a16="http://schemas.microsoft.com/office/drawing/2014/main" id="{38CB174B-8300-8DDA-E847-2AE80BA600F3}"/>
+              </a:ext>
+            </a:extLst>
+          </p:cNvPr>
           <p:cNvSpPr txBox="1"/>
           <p:nvPr/>
         </p:nvSpPr>
@@ -3651,14 +4244,20 @@
               </a:defRPr>
             </a:pPr>
             <a:r>
-              <a:t>Disenar la red: preguntas clave</a:t>
-            </a:r>
-          </a:p>
-        </p:txBody>
-      </p:sp>
-      <p:sp>
-        <p:nvSpPr>
-          <p:cNvPr id="4" name="Rectangle 3"/>
+              <a:t>Respuestas al debate de cierre</a:t>
+            </a:r>
+          </a:p>
+        </p:txBody>
+      </p:sp>
+      <p:sp>
+        <p:nvSpPr>
+          <p:cNvPr id="4" name="Rectangle 3">
+            <a:extLst>
+              <a:ext uri="{FF2B5EF4-FFF2-40B4-BE49-F238E27FC236}">
+                <a16:creationId xmlns:a16="http://schemas.microsoft.com/office/drawing/2014/main" id="{B9AD63EE-0586-35D1-688D-3C88C6012E3C}"/>
+              </a:ext>
+            </a:extLst>
+          </p:cNvPr>
           <p:cNvSpPr/>
           <p:nvPr/>
         </p:nvSpPr>
@@ -3696,19 +4295,26 @@
           <a:lstStyle/>
           <a:p>
             <a:pPr algn="ctr"/>
-          </a:p>
-        </p:txBody>
-      </p:sp>
-      <p:sp>
-        <p:nvSpPr>
-          <p:cNvPr id="5" name="TextBox 4"/>
+            <a:endParaRPr/>
+          </a:p>
+        </p:txBody>
+      </p:sp>
+      <p:sp>
+        <p:nvSpPr>
+          <p:cNvPr id="5" name="TextBox 4">
+            <a:extLst>
+              <a:ext uri="{FF2B5EF4-FFF2-40B4-BE49-F238E27FC236}">
+                <a16:creationId xmlns:a16="http://schemas.microsoft.com/office/drawing/2014/main" id="{54C8A947-4584-A895-21A4-261E282F0144}"/>
+              </a:ext>
+            </a:extLst>
+          </p:cNvPr>
           <p:cNvSpPr txBox="1"/>
           <p:nvPr/>
         </p:nvSpPr>
         <p:spPr>
           <a:xfrm>
             <a:off x="640080" y="1280160"/>
-            <a:ext cx="10515600" cy="5029200"/>
+            <a:ext cx="10515600" cy="3365024"/>
           </a:xfrm>
           <a:prstGeom prst="rect">
             <a:avLst/>
@@ -3733,7 +4339,91 @@
               </a:defRPr>
             </a:pPr>
             <a:r>
-              <a:t>¿Cuantas organizaciones? ¿Cada una tiene su propio peer?</a:t>
+              <a:rPr lang="es-ES" dirty="0"/>
+              <a:t>4. ¿Que es mas </a:t>
+            </a:r>
+            <a:r>
+              <a:rPr lang="es-ES" dirty="0" err="1"/>
+              <a:t>dificil</a:t>
+            </a:r>
+            <a:r>
+              <a:rPr lang="es-ES" dirty="0"/>
+              <a:t>?</a:t>
+            </a:r>
+          </a:p>
+          <a:p>
+            <a:pPr lvl="1">
+              <a:spcAft>
+                <a:spcPts val="400"/>
+              </a:spcAft>
+              <a:defRPr sz="1700">
+                <a:solidFill>
+                  <a:srgbClr val="666666"/>
+                </a:solidFill>
+                <a:latin typeface="Calibri"/>
+              </a:defRPr>
+            </a:pPr>
+            <a:r>
+              <a:rPr lang="es-ES" dirty="0"/>
+              <a:t>    Consenso habitual: GOBERNANZA &gt; REGULACION &gt; TECNOLOGIA.</a:t>
+            </a:r>
+          </a:p>
+          <a:p>
+            <a:pPr lvl="1">
+              <a:spcAft>
+                <a:spcPts val="400"/>
+              </a:spcAft>
+              <a:defRPr sz="1700">
+                <a:solidFill>
+                  <a:srgbClr val="666666"/>
+                </a:solidFill>
+                <a:latin typeface="Calibri"/>
+              </a:defRPr>
+            </a:pPr>
+            <a:r>
+              <a:rPr lang="es-ES" dirty="0"/>
+              <a:t>    La </a:t>
+            </a:r>
+            <a:r>
+              <a:rPr lang="es-ES" dirty="0" err="1"/>
+              <a:t>tecnologia</a:t>
+            </a:r>
+            <a:r>
+              <a:rPr lang="es-ES" dirty="0"/>
+              <a:t> esta madura; la gobernanza no siempre se resuelve bien.</a:t>
+            </a:r>
+          </a:p>
+          <a:p>
+            <a:pPr lvl="1">
+              <a:spcAft>
+                <a:spcPts val="400"/>
+              </a:spcAft>
+              <a:defRPr sz="1700">
+                <a:solidFill>
+                  <a:srgbClr val="666666"/>
+                </a:solidFill>
+                <a:latin typeface="Calibri"/>
+              </a:defRPr>
+            </a:pPr>
+            <a:r>
+              <a:rPr lang="es-ES" dirty="0"/>
+              <a:t>    La </a:t>
+            </a:r>
+            <a:r>
+              <a:rPr lang="es-ES" dirty="0" err="1"/>
+              <a:t>regulacion</a:t>
+            </a:r>
+            <a:r>
+              <a:rPr lang="es-ES" dirty="0"/>
+              <a:t> depende de la </a:t>
+            </a:r>
+            <a:r>
+              <a:rPr lang="es-ES" dirty="0" err="1"/>
+              <a:t>jurisdiccion</a:t>
+            </a:r>
+            <a:r>
+              <a:rPr lang="es-ES" dirty="0"/>
+              <a:t> y evoluciona, no es un bloqueo absoluto.</a:t>
             </a:r>
           </a:p>
           <a:p>
@@ -3749,108 +4439,143 @@
               </a:defRPr>
             </a:pPr>
             <a:r>
-              <a:t>¿Cuantos canales? ¿Todas las orgs comparten todo o hay datos segregados?</a:t>
-            </a:r>
-          </a:p>
-          <a:p>
-            <a:pPr>
-              <a:spcAft>
-                <a:spcPts val="800"/>
-              </a:spcAft>
-              <a:defRPr sz="2000">
-                <a:solidFill>
-                  <a:srgbClr val="333333"/>
-                </a:solidFill>
-                <a:latin typeface="Calibri"/>
-              </a:defRPr>
-            </a:pPr>
-            <a:r>
-              <a:t>¿Que datos van on-chain y cuales off-chain?</a:t>
-            </a:r>
-          </a:p>
-          <a:p>
-            <a:pPr>
-              <a:spcAft>
-                <a:spcPts val="800"/>
-              </a:spcAft>
-              <a:defRPr sz="2000">
-                <a:solidFill>
-                  <a:srgbClr val="333333"/>
-                </a:solidFill>
-                <a:latin typeface="Calibri"/>
-              </a:defRPr>
-            </a:pPr>
-            <a:r>
-              <a:t>¿Private Data Collections o canales separados para datos confidenciales?</a:t>
-            </a:r>
-          </a:p>
-          <a:p>
-            <a:pPr>
-              <a:spcAft>
-                <a:spcPts val="800"/>
-              </a:spcAft>
-              <a:defRPr sz="2000">
-                <a:solidFill>
-                  <a:srgbClr val="333333"/>
-                </a:solidFill>
-                <a:latin typeface="Calibri"/>
-              </a:defRPr>
-            </a:pPr>
-            <a:r>
-              <a:t>¿CouchDB (rich queries) o LevelDB (rendimiento)?</a:t>
-            </a:r>
-          </a:p>
-          <a:p>
-            <a:pPr>
-              <a:spcAft>
-                <a:spcPts val="800"/>
-              </a:spcAft>
-              <a:defRPr sz="2000">
-                <a:solidFill>
-                  <a:srgbClr val="333333"/>
-                </a:solidFill>
-                <a:latin typeface="Calibri"/>
-              </a:defRPr>
-            </a:pPr>
-            <a:r>
-              <a:t>¿Cuantos orderers? ¿Quien los opera?</a:t>
-            </a:r>
-          </a:p>
-          <a:p>
-            <a:pPr>
-              <a:spcAft>
-                <a:spcPts val="800"/>
-              </a:spcAft>
-              <a:defRPr sz="2000">
-                <a:solidFill>
-                  <a:srgbClr val="333333"/>
-                </a:solidFill>
-                <a:latin typeface="Calibri"/>
-              </a:defRPr>
-            </a:pPr>
-            <a:r>
-              <a:t>¿cryptogen (piloto) o Fabric CA (produccion)?</a:t>
-            </a:r>
-          </a:p>
-          <a:p>
-            <a:pPr>
-              <a:spcAft>
-                <a:spcPts val="800"/>
-              </a:spcAft>
-              <a:defRPr sz="2000">
-                <a:solidFill>
-                  <a:srgbClr val="333333"/>
-                </a:solidFill>
-                <a:latin typeface="Calibri"/>
-              </a:defRPr>
-            </a:pPr>
-            <a:r>
-              <a:t>¿On-premise o cloud (AWS, Azure, IBM)?</a:t>
+              <a:rPr lang="es-ES" dirty="0"/>
+              <a:t>5. Proyecto con presupuesto ilimitado:</a:t>
+            </a:r>
+          </a:p>
+          <a:p>
+            <a:pPr lvl="1">
+              <a:spcAft>
+                <a:spcPts val="400"/>
+              </a:spcAft>
+              <a:defRPr sz="1700">
+                <a:solidFill>
+                  <a:srgbClr val="666666"/>
+                </a:solidFill>
+                <a:latin typeface="Calibri"/>
+              </a:defRPr>
+            </a:pPr>
+            <a:r>
+              <a:rPr lang="es-ES" dirty="0"/>
+              <a:t>    Trazabilidad alimentaria a escala europea (</a:t>
+            </a:r>
+            <a:r>
+              <a:rPr lang="es-ES" dirty="0" err="1"/>
+              <a:t>Food</a:t>
+            </a:r>
+            <a:r>
+              <a:rPr lang="es-ES" dirty="0"/>
+              <a:t> Trust pan-europeo).</a:t>
+            </a:r>
+          </a:p>
+          <a:p>
+            <a:pPr lvl="1">
+              <a:spcAft>
+                <a:spcPts val="400"/>
+              </a:spcAft>
+              <a:defRPr sz="1700">
+                <a:solidFill>
+                  <a:srgbClr val="666666"/>
+                </a:solidFill>
+                <a:latin typeface="Calibri"/>
+              </a:defRPr>
+            </a:pPr>
+            <a:r>
+              <a:rPr lang="es-ES" dirty="0"/>
+              <a:t>    KYC compartido entre bancos europeos.</a:t>
+            </a:r>
+          </a:p>
+          <a:p>
+            <a:pPr lvl="1">
+              <a:spcAft>
+                <a:spcPts val="400"/>
+              </a:spcAft>
+              <a:defRPr sz="1700">
+                <a:solidFill>
+                  <a:srgbClr val="666666"/>
+                </a:solidFill>
+                <a:latin typeface="Calibri"/>
+              </a:defRPr>
+            </a:pPr>
+            <a:r>
+              <a:rPr lang="es-ES" dirty="0"/>
+              <a:t>    Registro de propiedad inmobiliaria </a:t>
+            </a:r>
+            <a:r>
+              <a:rPr lang="es-ES" dirty="0" err="1"/>
+              <a:t>tokenizado</a:t>
+            </a:r>
+            <a:r>
+              <a:rPr lang="es-ES" dirty="0"/>
+              <a:t>.</a:t>
+            </a:r>
+          </a:p>
+          <a:p>
+            <a:pPr lvl="1">
+              <a:spcAft>
+                <a:spcPts val="400"/>
+              </a:spcAft>
+              <a:defRPr sz="1700">
+                <a:solidFill>
+                  <a:srgbClr val="666666"/>
+                </a:solidFill>
+                <a:latin typeface="Calibri"/>
+              </a:defRPr>
+            </a:pPr>
+            <a:r>
+              <a:rPr lang="es-ES" dirty="0"/>
+              <a:t>    </a:t>
+            </a:r>
+            <a:r>
+              <a:rPr lang="es-ES" dirty="0" err="1"/>
+              <a:t>Creditos</a:t>
+            </a:r>
+            <a:r>
+              <a:rPr lang="es-ES" dirty="0"/>
+              <a:t> de carbono auditables para cumplimiento </a:t>
+            </a:r>
+            <a:r>
+              <a:rPr lang="es-ES" dirty="0" err="1"/>
+              <a:t>climatico</a:t>
+            </a:r>
+            <a:r>
+              <a:rPr lang="es-ES" dirty="0"/>
+              <a:t>.</a:t>
+            </a:r>
+          </a:p>
+          <a:p>
+            <a:pPr lvl="1">
+              <a:spcAft>
+                <a:spcPts val="400"/>
+              </a:spcAft>
+              <a:defRPr sz="1700">
+                <a:solidFill>
+                  <a:srgbClr val="666666"/>
+                </a:solidFill>
+                <a:latin typeface="Calibri"/>
+              </a:defRPr>
+            </a:pPr>
+            <a:r>
+              <a:rPr lang="es-ES" dirty="0"/>
+              <a:t>    Interoperabilidad entre redes: </a:t>
+            </a:r>
+            <a:r>
+              <a:rPr lang="es-ES" dirty="0" err="1"/>
+              <a:t>Alastria</a:t>
+            </a:r>
+            <a:r>
+              <a:rPr lang="es-ES" dirty="0"/>
+              <a:t>-EBSI-HKMA interoperables.</a:t>
             </a:r>
           </a:p>
         </p:txBody>
       </p:sp>
     </p:spTree>
+    <p:extLst>
+      <p:ext uri="{BB962C8B-B14F-4D97-AF65-F5344CB8AC3E}">
+        <p14:creationId xmlns:p14="http://schemas.microsoft.com/office/powerpoint/2010/main" val="1332888619"/>
+      </p:ext>
+    </p:extLst>
   </p:cSld>
   <p:clrMapOvr>
     <a:masterClrMapping/>
@@ -3858,8 +4583,8 @@
 </p:sld>
 </file>
 
-<file path=ppt/slides/slide4.xml><?xml version="1.0" encoding="utf-8"?>
-<p:sld xmlns:a="http://schemas.openxmlformats.org/drawingml/2006/main" xmlns:p="http://schemas.openxmlformats.org/presentationml/2006/main" xmlns:r="http://schemas.openxmlformats.org/officeDocument/2006/relationships">
+<file path=ppt/slides/slide12.xml><?xml version="1.0" encoding="utf-8"?>
+<p:sld xmlns:a="http://schemas.openxmlformats.org/drawingml/2006/main" xmlns:r="http://schemas.openxmlformats.org/officeDocument/2006/relationships" xmlns:p="http://schemas.openxmlformats.org/presentationml/2006/main">
   <p:cSld>
     <p:spTree>
       <p:nvGrpSpPr>
@@ -3867,7 +4592,14 @@
         <p:cNvGrpSpPr/>
         <p:nvPr/>
       </p:nvGrpSpPr>
-      <p:grpSpPr/>
+      <p:grpSpPr>
+        <a:xfrm>
+          <a:off x="0" y="0"/>
+          <a:ext cx="0" cy="0"/>
+          <a:chOff x="0" y="0"/>
+          <a:chExt cx="0" cy="0"/>
+        </a:xfrm>
+      </p:grpSpPr>
       <p:sp>
         <p:nvSpPr>
           <p:cNvPr id="2" name="Rectangle 1"/>
@@ -3908,6 +4640,7 @@
           <a:lstStyle/>
           <a:p>
             <a:pPr algn="ctr"/>
+            <a:endParaRPr/>
           </a:p>
         </p:txBody>
       </p:sp>
@@ -3940,7 +4673,7 @@
               </a:defRPr>
             </a:pPr>
             <a:r>
-              <a:t>Template: topologia de red Fabric</a:t>
+              <a:t>Respuestas al repaso del Modulo 3 (1/2)</a:t>
             </a:r>
           </a:p>
         </p:txBody>
@@ -3985,62 +4718,20 @@
           <a:lstStyle/>
           <a:p>
             <a:pPr algn="ctr"/>
-          </a:p>
-        </p:txBody>
-      </p:sp>
-      <p:sp>
-        <p:nvSpPr>
-          <p:cNvPr id="5" name="Rectangle 4"/>
-          <p:cNvSpPr/>
+            <a:endParaRPr/>
+          </a:p>
+        </p:txBody>
+      </p:sp>
+      <p:sp>
+        <p:nvSpPr>
+          <p:cNvPr id="5" name="TextBox 4"/>
+          <p:cNvSpPr txBox="1"/>
           <p:nvPr/>
         </p:nvSpPr>
         <p:spPr>
           <a:xfrm>
-            <a:off x="1371600" y="1371600"/>
-            <a:ext cx="9418320" cy="4114800"/>
-          </a:xfrm>
-          <a:prstGeom prst="rect">
-            <a:avLst/>
-          </a:prstGeom>
-          <a:solidFill>
-            <a:srgbClr val="F2F2F2"/>
-          </a:solidFill>
-          <a:ln>
-            <a:noFill/>
-          </a:ln>
-        </p:spPr>
-        <p:style>
-          <a:lnRef idx="1">
-            <a:schemeClr val="accent1"/>
-          </a:lnRef>
-          <a:fillRef idx="3">
-            <a:schemeClr val="accent1"/>
-          </a:fillRef>
-          <a:effectRef idx="2">
-            <a:schemeClr val="accent1"/>
-          </a:effectRef>
-          <a:fontRef idx="minor">
-            <a:schemeClr val="lt1"/>
-          </a:fontRef>
-        </p:style>
-        <p:txBody>
-          <a:bodyPr rtlCol="0" anchor="ctr"/>
-          <a:lstStyle/>
-          <a:p>
-            <a:pPr algn="ctr"/>
-          </a:p>
-        </p:txBody>
-      </p:sp>
-      <p:sp>
-        <p:nvSpPr>
-          <p:cNvPr id="6" name="TextBox 5"/>
-          <p:cNvSpPr txBox="1"/>
-          <p:nvPr/>
-        </p:nvSpPr>
-        <p:spPr>
-          <a:xfrm>
-            <a:off x="1828800" y="2286000"/>
-            <a:ext cx="8503920" cy="1371600"/>
+            <a:off x="584421" y="1124712"/>
+            <a:ext cx="10515600" cy="5750292"/>
           </a:xfrm>
           <a:prstGeom prst="rect">
             <a:avLst/>
@@ -4048,130 +4739,809 @@
           <a:noFill/>
         </p:spPr>
         <p:txBody>
-          <a:bodyPr wrap="square"/>
-          <a:lstStyle/>
-          <a:p>
-            <a:pPr algn="ctr">
-              <a:defRPr sz="2400" b="0">
-                <a:solidFill>
-                  <a:srgbClr val="999999"/>
-                </a:solidFill>
-                <a:latin typeface="Calibri"/>
-              </a:defRPr>
-            </a:pPr>
-            <a:r>
-              <a:t>[Diagrama en blanco con cajas para rellenar: Org1, Org2, Org3, Orderer, Canal A, Canal B, Private Data]</a:t>
-            </a:r>
-          </a:p>
-        </p:txBody>
-      </p:sp>
-      <p:sp>
-        <p:nvSpPr>
-          <p:cNvPr id="7" name="Rectangle 6"/>
-          <p:cNvSpPr/>
-          <p:nvPr/>
-        </p:nvSpPr>
-        <p:spPr>
-          <a:xfrm>
-            <a:off x="1371600" y="3840480"/>
-            <a:ext cx="9418320" cy="320040"/>
-          </a:xfrm>
-          <a:prstGeom prst="rect">
-            <a:avLst/>
-          </a:prstGeom>
-          <a:solidFill>
-            <a:srgbClr val="7C3AED"/>
-          </a:solidFill>
-          <a:ln>
-            <a:noFill/>
-          </a:ln>
-        </p:spPr>
-        <p:style>
-          <a:lnRef idx="1">
-            <a:schemeClr val="accent1"/>
-          </a:lnRef>
-          <a:fillRef idx="3">
-            <a:schemeClr val="accent1"/>
-          </a:fillRef>
-          <a:effectRef idx="2">
-            <a:schemeClr val="accent1"/>
-          </a:effectRef>
-          <a:fontRef idx="minor">
-            <a:schemeClr val="lt1"/>
-          </a:fontRef>
-        </p:style>
-        <p:txBody>
-          <a:bodyPr rtlCol="0" anchor="ctr"/>
-          <a:lstStyle/>
-          <a:p>
-            <a:pPr algn="ctr"/>
-          </a:p>
-        </p:txBody>
-      </p:sp>
-      <p:sp>
-        <p:nvSpPr>
-          <p:cNvPr id="8" name="TextBox 7"/>
-          <p:cNvSpPr txBox="1"/>
-          <p:nvPr/>
-        </p:nvSpPr>
-        <p:spPr>
-          <a:xfrm>
-            <a:off x="1371600" y="3840480"/>
-            <a:ext cx="9418320" cy="320040"/>
-          </a:xfrm>
-          <a:prstGeom prst="rect">
-            <a:avLst/>
-          </a:prstGeom>
-          <a:noFill/>
-        </p:spPr>
-        <p:txBody>
-          <a:bodyPr wrap="square"/>
-          <a:lstStyle/>
-          <a:p>
-            <a:pPr algn="ctr">
-              <a:defRPr sz="1300" b="1">
-                <a:solidFill>
-                  <a:srgbClr val="FFFFFF"/>
-                </a:solidFill>
-                <a:latin typeface="Calibri"/>
-              </a:defRPr>
-            </a:pPr>
-            <a:r>
-              <a:t>Prompt para IA generativa:</a:t>
-            </a:r>
-          </a:p>
-        </p:txBody>
-      </p:sp>
-      <p:sp>
-        <p:nvSpPr>
-          <p:cNvPr id="9" name="TextBox 8"/>
-          <p:cNvSpPr txBox="1"/>
-          <p:nvPr/>
-        </p:nvSpPr>
-        <p:spPr>
-          <a:xfrm>
-            <a:off x="1645920" y="4297680"/>
-            <a:ext cx="8869680" cy="914400"/>
-          </a:xfrm>
-          <a:prstGeom prst="rect">
-            <a:avLst/>
-          </a:prstGeom>
-          <a:noFill/>
-        </p:spPr>
-        <p:txBody>
-          <a:bodyPr wrap="square"/>
-          <a:lstStyle/>
-          <a:p>
-            <a:pPr algn="l">
-              <a:defRPr sz="1400" b="0">
-                <a:solidFill>
-                  <a:srgbClr val="7C3AED"/>
-                </a:solidFill>
-                <a:latin typeface="Consolas"/>
-              </a:defRPr>
-            </a:pPr>
-            <a:r>
-              <a:t>Blank network topology template for Hyperledger Fabric: empty boxes labeled Org1, Org2, Org3, Orderer Service. Dashed lines showing potential channels (Channel A, Channel B). Separate box for Private Data Collections. Clean wireframe style, ready to be filled in by students.</a:t>
+          <a:bodyPr wrap="square">
+            <a:spAutoFit/>
+          </a:bodyPr>
+          <a:lstStyle/>
+          <a:p>
+            <a:pPr>
+              <a:spcAft>
+                <a:spcPts val="800"/>
+              </a:spcAft>
+              <a:defRPr sz="2000">
+                <a:solidFill>
+                  <a:srgbClr val="333333"/>
+                </a:solidFill>
+                <a:latin typeface="Calibri"/>
+              </a:defRPr>
+            </a:pPr>
+            <a:r>
+              <a:rPr dirty="0"/>
+              <a:t>1. Casos de </a:t>
+            </a:r>
+            <a:r>
+              <a:rPr dirty="0" err="1"/>
+              <a:t>exito</a:t>
+            </a:r>
+            <a:r>
+              <a:rPr dirty="0"/>
+              <a:t>/</a:t>
+            </a:r>
+            <a:r>
+              <a:rPr dirty="0" err="1"/>
+              <a:t>fracaso</a:t>
+            </a:r>
+            <a:r>
+              <a:rPr dirty="0"/>
+              <a:t> — </a:t>
+            </a:r>
+            <a:r>
+              <a:rPr dirty="0" err="1"/>
+              <a:t>patrones</a:t>
+            </a:r>
+            <a:r>
+              <a:rPr dirty="0"/>
+              <a:t> </a:t>
+            </a:r>
+            <a:r>
+              <a:rPr dirty="0" err="1"/>
+              <a:t>comunes</a:t>
+            </a:r>
+            <a:r>
+              <a:rPr dirty="0"/>
+              <a:t>:</a:t>
+            </a:r>
+          </a:p>
+          <a:p>
+            <a:pPr lvl="1">
+              <a:spcAft>
+                <a:spcPts val="400"/>
+              </a:spcAft>
+              <a:defRPr sz="1700">
+                <a:solidFill>
+                  <a:srgbClr val="666666"/>
+                </a:solidFill>
+                <a:latin typeface="Calibri"/>
+              </a:defRPr>
+            </a:pPr>
+            <a:r>
+              <a:rPr sz="1600" dirty="0"/>
+              <a:t>    Los </a:t>
+            </a:r>
+            <a:r>
+              <a:rPr sz="1600" dirty="0" err="1"/>
+              <a:t>que</a:t>
+            </a:r>
+            <a:r>
+              <a:rPr sz="1600" dirty="0"/>
+              <a:t> </a:t>
+            </a:r>
+            <a:r>
+              <a:rPr sz="1600" dirty="0" err="1"/>
+              <a:t>funcionan</a:t>
+            </a:r>
+            <a:r>
+              <a:rPr sz="1600" dirty="0"/>
+              <a:t>: </a:t>
+            </a:r>
+            <a:r>
+              <a:rPr sz="1600" dirty="0" err="1"/>
+              <a:t>consorcio</a:t>
+            </a:r>
+            <a:r>
+              <a:rPr sz="1600" dirty="0"/>
+              <a:t> con </a:t>
+            </a:r>
+            <a:r>
+              <a:rPr sz="1600" dirty="0" err="1"/>
+              <a:t>incentivos</a:t>
+            </a:r>
+            <a:r>
+              <a:rPr sz="1600" dirty="0"/>
+              <a:t> </a:t>
+            </a:r>
+            <a:r>
+              <a:rPr sz="1600" dirty="0" err="1"/>
+              <a:t>alineados</a:t>
+            </a:r>
+            <a:r>
+              <a:rPr sz="1600" dirty="0"/>
+              <a:t>, </a:t>
+            </a:r>
+            <a:r>
+              <a:rPr sz="1600" dirty="0" err="1"/>
+              <a:t>regulacion</a:t>
+            </a:r>
+            <a:r>
+              <a:rPr sz="1600" dirty="0"/>
+              <a:t> compatible,</a:t>
+            </a:r>
+          </a:p>
+          <a:p>
+            <a:pPr lvl="1">
+              <a:spcAft>
+                <a:spcPts val="400"/>
+              </a:spcAft>
+              <a:defRPr sz="1700">
+                <a:solidFill>
+                  <a:srgbClr val="666666"/>
+                </a:solidFill>
+                <a:latin typeface="Calibri"/>
+              </a:defRPr>
+            </a:pPr>
+            <a:r>
+              <a:rPr sz="1600" dirty="0"/>
+              <a:t>    UX </a:t>
+            </a:r>
+            <a:r>
+              <a:rPr sz="1600" dirty="0" err="1"/>
+              <a:t>transparente</a:t>
+            </a:r>
+            <a:r>
+              <a:rPr sz="1600" dirty="0"/>
+              <a:t>, MVP </a:t>
+            </a:r>
+            <a:r>
+              <a:rPr sz="1600" dirty="0" err="1"/>
+              <a:t>pequeno</a:t>
+            </a:r>
+            <a:r>
+              <a:rPr sz="1600" dirty="0"/>
+              <a:t>, </a:t>
+            </a:r>
+            <a:r>
+              <a:rPr sz="1600" dirty="0" err="1"/>
+              <a:t>gobernanza</a:t>
+            </a:r>
+            <a:r>
+              <a:rPr sz="1600" dirty="0"/>
+              <a:t> </a:t>
+            </a:r>
+            <a:r>
+              <a:rPr sz="1600" dirty="0" err="1"/>
+              <a:t>equilibrada</a:t>
+            </a:r>
+            <a:r>
+              <a:rPr sz="1600" dirty="0"/>
+              <a:t>.</a:t>
+            </a:r>
+          </a:p>
+          <a:p>
+            <a:pPr lvl="1">
+              <a:spcAft>
+                <a:spcPts val="400"/>
+              </a:spcAft>
+              <a:defRPr sz="1700">
+                <a:solidFill>
+                  <a:srgbClr val="666666"/>
+                </a:solidFill>
+                <a:latin typeface="Calibri"/>
+              </a:defRPr>
+            </a:pPr>
+            <a:r>
+              <a:rPr sz="1600" dirty="0"/>
+              <a:t>    Los </a:t>
+            </a:r>
+            <a:r>
+              <a:rPr sz="1600" dirty="0" err="1"/>
+              <a:t>que</a:t>
+            </a:r>
+            <a:r>
+              <a:rPr sz="1600" dirty="0"/>
+              <a:t> </a:t>
+            </a:r>
+            <a:r>
+              <a:rPr sz="1600" dirty="0" err="1"/>
+              <a:t>fracasan</a:t>
+            </a:r>
+            <a:r>
+              <a:rPr sz="1600" dirty="0"/>
+              <a:t>: </a:t>
+            </a:r>
+            <a:r>
+              <a:rPr sz="1600" dirty="0" err="1"/>
+              <a:t>fundador</a:t>
+            </a:r>
+            <a:r>
+              <a:rPr sz="1600" dirty="0"/>
+              <a:t> </a:t>
+            </a:r>
+            <a:r>
+              <a:rPr sz="1600" dirty="0" err="1"/>
+              <a:t>dominante</a:t>
+            </a:r>
+            <a:r>
+              <a:rPr sz="1600" dirty="0"/>
+              <a:t>, sin </a:t>
+            </a:r>
+            <a:r>
+              <a:rPr sz="1600" dirty="0" err="1"/>
+              <a:t>modelo</a:t>
+            </a:r>
+            <a:r>
+              <a:rPr sz="1600" dirty="0"/>
+              <a:t> de </a:t>
+            </a:r>
+            <a:r>
+              <a:rPr sz="1600" dirty="0" err="1"/>
+              <a:t>ingresos</a:t>
+            </a:r>
+            <a:r>
+              <a:rPr sz="1600" dirty="0"/>
+              <a:t>,</a:t>
+            </a:r>
+          </a:p>
+          <a:p>
+            <a:pPr lvl="1">
+              <a:spcAft>
+                <a:spcPts val="400"/>
+              </a:spcAft>
+              <a:defRPr sz="1700">
+                <a:solidFill>
+                  <a:srgbClr val="666666"/>
+                </a:solidFill>
+                <a:latin typeface="Calibri"/>
+              </a:defRPr>
+            </a:pPr>
+            <a:r>
+              <a:rPr sz="1600" dirty="0"/>
+              <a:t>    </a:t>
+            </a:r>
+            <a:r>
+              <a:rPr sz="1600" dirty="0" err="1"/>
+              <a:t>regulacion</a:t>
+            </a:r>
+            <a:r>
+              <a:rPr sz="1600" dirty="0"/>
+              <a:t> incompatible, UX </a:t>
+            </a:r>
+            <a:r>
+              <a:rPr sz="1600" dirty="0" err="1"/>
+              <a:t>compleja</a:t>
+            </a:r>
+            <a:r>
+              <a:rPr sz="1600" dirty="0"/>
+              <a:t>, </a:t>
+            </a:r>
+            <a:r>
+              <a:rPr sz="1600" dirty="0" err="1"/>
+              <a:t>intentar</a:t>
+            </a:r>
+            <a:r>
+              <a:rPr sz="1600" dirty="0"/>
+              <a:t> </a:t>
+            </a:r>
+            <a:r>
+              <a:rPr sz="1600" dirty="0" err="1"/>
+              <a:t>cubrir</a:t>
+            </a:r>
+            <a:r>
+              <a:rPr sz="1600" dirty="0"/>
+              <a:t> </a:t>
+            </a:r>
+            <a:r>
+              <a:rPr sz="1600" dirty="0" err="1"/>
+              <a:t>todo</a:t>
+            </a:r>
+            <a:r>
+              <a:rPr sz="1600" dirty="0"/>
+              <a:t> </a:t>
+            </a:r>
+            <a:r>
+              <a:rPr sz="1600" dirty="0" err="1"/>
+              <a:t>el</a:t>
+            </a:r>
+            <a:r>
+              <a:rPr sz="1600" dirty="0"/>
+              <a:t> mercado.</a:t>
+            </a:r>
+          </a:p>
+          <a:p>
+            <a:pPr>
+              <a:spcAft>
+                <a:spcPts val="800"/>
+              </a:spcAft>
+              <a:defRPr sz="2000">
+                <a:solidFill>
+                  <a:srgbClr val="333333"/>
+                </a:solidFill>
+                <a:latin typeface="Calibri"/>
+              </a:defRPr>
+            </a:pPr>
+            <a:r>
+              <a:rPr dirty="0"/>
+              <a:t>2. Arbol de decision ¿blockchain o BD?</a:t>
+            </a:r>
+          </a:p>
+          <a:p>
+            <a:pPr lvl="1">
+              <a:spcAft>
+                <a:spcPts val="400"/>
+              </a:spcAft>
+              <a:defRPr sz="1700">
+                <a:solidFill>
+                  <a:srgbClr val="666666"/>
+                </a:solidFill>
+                <a:latin typeface="Calibri"/>
+              </a:defRPr>
+            </a:pPr>
+            <a:r>
+              <a:rPr sz="1600" dirty="0"/>
+              <a:t>    5 </a:t>
+            </a:r>
+            <a:r>
+              <a:rPr sz="1600" dirty="0" err="1"/>
+              <a:t>preguntas</a:t>
+            </a:r>
+            <a:r>
+              <a:rPr sz="1600" dirty="0"/>
+              <a:t>: partes sin confianza / </a:t>
+            </a:r>
+            <a:r>
+              <a:rPr sz="1600" dirty="0" err="1"/>
+              <a:t>compartir</a:t>
+            </a:r>
+            <a:r>
+              <a:rPr sz="1600" dirty="0"/>
+              <a:t> </a:t>
+            </a:r>
+            <a:r>
+              <a:rPr sz="1600" dirty="0" err="1"/>
+              <a:t>datos</a:t>
+            </a:r>
+            <a:r>
+              <a:rPr sz="1600" dirty="0"/>
+              <a:t> / </a:t>
+            </a:r>
+            <a:r>
+              <a:rPr sz="1600" dirty="0" err="1"/>
+              <a:t>inmutabilidad</a:t>
+            </a:r>
+            <a:r>
+              <a:rPr sz="1600" dirty="0"/>
+              <a:t> </a:t>
+            </a:r>
+            <a:r>
+              <a:rPr sz="1600" dirty="0" err="1"/>
+              <a:t>critica</a:t>
+            </a:r>
+            <a:r>
+              <a:rPr sz="1600" dirty="0"/>
+              <a:t> /</a:t>
+            </a:r>
+          </a:p>
+          <a:p>
+            <a:pPr lvl="1">
+              <a:spcAft>
+                <a:spcPts val="400"/>
+              </a:spcAft>
+              <a:defRPr sz="1700">
+                <a:solidFill>
+                  <a:srgbClr val="666666"/>
+                </a:solidFill>
+                <a:latin typeface="Calibri"/>
+              </a:defRPr>
+            </a:pPr>
+            <a:r>
+              <a:rPr sz="1600" dirty="0"/>
+              <a:t>    </a:t>
+            </a:r>
+            <a:r>
+              <a:rPr sz="1600" dirty="0" err="1"/>
+              <a:t>reglas</a:t>
+            </a:r>
+            <a:r>
+              <a:rPr sz="1600" dirty="0"/>
+              <a:t> </a:t>
+            </a:r>
+            <a:r>
+              <a:rPr sz="1600" dirty="0" err="1"/>
+              <a:t>verificables</a:t>
+            </a:r>
+            <a:r>
+              <a:rPr sz="1600" dirty="0"/>
+              <a:t> / </a:t>
+            </a:r>
+            <a:r>
+              <a:rPr sz="1600" dirty="0" err="1"/>
+              <a:t>ningun</a:t>
+            </a:r>
+            <a:r>
+              <a:rPr sz="1600" dirty="0"/>
+              <a:t> </a:t>
+            </a:r>
+            <a:r>
+              <a:rPr sz="1600" dirty="0" err="1"/>
+              <a:t>dueno</a:t>
+            </a:r>
+            <a:r>
+              <a:rPr sz="1600" dirty="0"/>
+              <a:t> </a:t>
+            </a:r>
+            <a:r>
+              <a:rPr sz="1600" dirty="0" err="1"/>
+              <a:t>unico</a:t>
+            </a:r>
+            <a:r>
+              <a:rPr sz="1600" dirty="0"/>
+              <a:t>. Si a </a:t>
+            </a:r>
+            <a:r>
+              <a:rPr sz="1600" dirty="0" err="1"/>
+              <a:t>todas</a:t>
+            </a:r>
+            <a:r>
+              <a:rPr sz="1600" dirty="0"/>
+              <a:t> -&gt; blockchain.</a:t>
+            </a:r>
+          </a:p>
+          <a:p>
+            <a:pPr>
+              <a:spcAft>
+                <a:spcPts val="800"/>
+              </a:spcAft>
+              <a:defRPr sz="2000">
+                <a:solidFill>
+                  <a:srgbClr val="333333"/>
+                </a:solidFill>
+                <a:latin typeface="Calibri"/>
+              </a:defRPr>
+            </a:pPr>
+            <a:r>
+              <a:rPr dirty="0"/>
+              <a:t>3. Como </a:t>
+            </a:r>
+            <a:r>
+              <a:rPr dirty="0" err="1"/>
+              <a:t>presentar</a:t>
+            </a:r>
+            <a:r>
+              <a:rPr dirty="0"/>
+              <a:t> a </a:t>
+            </a:r>
+            <a:r>
+              <a:rPr dirty="0" err="1"/>
+              <a:t>direccion</a:t>
+            </a:r>
+            <a:r>
+              <a:rPr dirty="0"/>
+              <a:t>:</a:t>
+            </a:r>
+          </a:p>
+          <a:p>
+            <a:pPr lvl="1">
+              <a:spcAft>
+                <a:spcPts val="400"/>
+              </a:spcAft>
+              <a:defRPr sz="1700">
+                <a:solidFill>
+                  <a:srgbClr val="666666"/>
+                </a:solidFill>
+                <a:latin typeface="Calibri"/>
+              </a:defRPr>
+            </a:pPr>
+            <a:r>
+              <a:rPr sz="1600" dirty="0"/>
+              <a:t>    </a:t>
+            </a:r>
+            <a:r>
+              <a:rPr sz="1600" dirty="0" err="1"/>
+              <a:t>Empezar</a:t>
+            </a:r>
+            <a:r>
+              <a:rPr sz="1600" dirty="0"/>
+              <a:t> </a:t>
+            </a:r>
+            <a:r>
+              <a:rPr sz="1600" dirty="0" err="1"/>
+              <a:t>por</a:t>
+            </a:r>
+            <a:r>
+              <a:rPr sz="1600" dirty="0"/>
+              <a:t> </a:t>
+            </a:r>
+            <a:r>
+              <a:rPr sz="1600" dirty="0" err="1"/>
+              <a:t>el</a:t>
+            </a:r>
+            <a:r>
+              <a:rPr sz="1600" dirty="0"/>
+              <a:t> </a:t>
+            </a:r>
+            <a:r>
+              <a:rPr sz="1600" dirty="0" err="1"/>
+              <a:t>problema</a:t>
+            </a:r>
+            <a:r>
+              <a:rPr sz="1600" dirty="0"/>
+              <a:t> y </a:t>
+            </a:r>
+            <a:r>
+              <a:rPr sz="1600" dirty="0" err="1"/>
+              <a:t>el</a:t>
+            </a:r>
+            <a:r>
+              <a:rPr sz="1600" dirty="0"/>
+              <a:t> </a:t>
+            </a:r>
+            <a:r>
+              <a:rPr sz="1600" dirty="0" err="1"/>
+              <a:t>coste</a:t>
+            </a:r>
+            <a:r>
+              <a:rPr sz="1600" dirty="0"/>
+              <a:t> actual.</a:t>
+            </a:r>
+          </a:p>
+          <a:p>
+            <a:pPr lvl="1">
+              <a:spcAft>
+                <a:spcPts val="400"/>
+              </a:spcAft>
+              <a:defRPr sz="1700">
+                <a:solidFill>
+                  <a:srgbClr val="666666"/>
+                </a:solidFill>
+                <a:latin typeface="Calibri"/>
+              </a:defRPr>
+            </a:pPr>
+            <a:r>
+              <a:rPr sz="1600" dirty="0"/>
+              <a:t>    </a:t>
+            </a:r>
+            <a:r>
+              <a:rPr sz="1600" dirty="0" err="1"/>
+              <a:t>Evitar</a:t>
+            </a:r>
+            <a:r>
+              <a:rPr sz="1600" dirty="0"/>
+              <a:t> la palabra 'blockchain' al </a:t>
+            </a:r>
+            <a:r>
+              <a:rPr sz="1600" dirty="0" err="1"/>
+              <a:t>inicio</a:t>
+            </a:r>
+            <a:r>
+              <a:rPr sz="1600" dirty="0"/>
+              <a:t>.</a:t>
+            </a:r>
+          </a:p>
+          <a:p>
+            <a:pPr lvl="1">
+              <a:spcAft>
+                <a:spcPts val="400"/>
+              </a:spcAft>
+              <a:defRPr sz="1700">
+                <a:solidFill>
+                  <a:srgbClr val="666666"/>
+                </a:solidFill>
+                <a:latin typeface="Calibri"/>
+              </a:defRPr>
+            </a:pPr>
+            <a:r>
+              <a:rPr sz="1600" dirty="0"/>
+              <a:t>    Hablar de '</a:t>
+            </a:r>
+            <a:r>
+              <a:rPr sz="1600" dirty="0" err="1"/>
+              <a:t>registro</a:t>
+            </a:r>
+            <a:r>
+              <a:rPr sz="1600" dirty="0"/>
+              <a:t> </a:t>
+            </a:r>
+            <a:r>
+              <a:rPr sz="1600" dirty="0" err="1"/>
+              <a:t>distribuido</a:t>
+            </a:r>
+            <a:r>
+              <a:rPr sz="1600" dirty="0"/>
+              <a:t> </a:t>
+            </a:r>
+            <a:r>
+              <a:rPr sz="1600" dirty="0" err="1"/>
+              <a:t>compartido</a:t>
+            </a:r>
+            <a:r>
+              <a:rPr sz="1600" dirty="0"/>
+              <a:t>'.</a:t>
+            </a:r>
+          </a:p>
+          <a:p>
+            <a:pPr lvl="1">
+              <a:spcAft>
+                <a:spcPts val="400"/>
+              </a:spcAft>
+              <a:defRPr sz="1700">
+                <a:solidFill>
+                  <a:srgbClr val="666666"/>
+                </a:solidFill>
+                <a:latin typeface="Calibri"/>
+              </a:defRPr>
+            </a:pPr>
+            <a:r>
+              <a:rPr sz="1600" dirty="0"/>
+              <a:t>    </a:t>
+            </a:r>
+            <a:r>
+              <a:rPr sz="1600" dirty="0" err="1"/>
+              <a:t>Presentar</a:t>
+            </a:r>
+            <a:r>
+              <a:rPr sz="1600" dirty="0"/>
+              <a:t> ROI, </a:t>
+            </a:r>
+            <a:r>
+              <a:rPr sz="1600" dirty="0" err="1"/>
+              <a:t>socios</a:t>
+            </a:r>
+            <a:r>
+              <a:rPr sz="1600" dirty="0"/>
+              <a:t>, MVP, </a:t>
+            </a:r>
+            <a:r>
+              <a:rPr sz="1600" dirty="0" err="1"/>
+              <a:t>riesgos</a:t>
+            </a:r>
+            <a:r>
+              <a:rPr sz="1600" dirty="0"/>
+              <a:t>.</a:t>
+            </a:r>
+          </a:p>
+          <a:p>
+            <a:pPr>
+              <a:spcAft>
+                <a:spcPts val="800"/>
+              </a:spcAft>
+              <a:defRPr sz="2000">
+                <a:solidFill>
+                  <a:srgbClr val="333333"/>
+                </a:solidFill>
+                <a:latin typeface="Calibri"/>
+              </a:defRPr>
+            </a:pPr>
+            <a:r>
+              <a:rPr dirty="0"/>
+              <a:t>4. </a:t>
+            </a:r>
+            <a:r>
+              <a:rPr dirty="0" err="1"/>
+              <a:t>Modelos</a:t>
+            </a:r>
+            <a:r>
+              <a:rPr dirty="0"/>
+              <a:t> de </a:t>
+            </a:r>
+            <a:r>
+              <a:rPr dirty="0" err="1"/>
+              <a:t>gobernanza</a:t>
+            </a:r>
+            <a:r>
+              <a:rPr dirty="0"/>
+              <a:t>:</a:t>
+            </a:r>
+          </a:p>
+          <a:p>
+            <a:pPr lvl="1">
+              <a:spcAft>
+                <a:spcPts val="400"/>
+              </a:spcAft>
+              <a:defRPr sz="1700">
+                <a:solidFill>
+                  <a:srgbClr val="666666"/>
+                </a:solidFill>
+                <a:latin typeface="Calibri"/>
+              </a:defRPr>
+            </a:pPr>
+            <a:r>
+              <a:rPr sz="1600" dirty="0"/>
+              <a:t>    </a:t>
+            </a:r>
+            <a:r>
+              <a:rPr sz="1600" dirty="0" err="1"/>
+              <a:t>Fundador</a:t>
+            </a:r>
+            <a:r>
+              <a:rPr sz="1600" dirty="0"/>
+              <a:t> </a:t>
+            </a:r>
+            <a:r>
+              <a:rPr sz="1600" dirty="0" err="1"/>
+              <a:t>dominante</a:t>
+            </a:r>
+            <a:r>
+              <a:rPr sz="1600" dirty="0"/>
+              <a:t>: Walmart Food Trust.</a:t>
+            </a:r>
+          </a:p>
+          <a:p>
+            <a:pPr lvl="1">
+              <a:spcAft>
+                <a:spcPts val="400"/>
+              </a:spcAft>
+              <a:defRPr sz="1700">
+                <a:solidFill>
+                  <a:srgbClr val="666666"/>
+                </a:solidFill>
+                <a:latin typeface="Calibri"/>
+              </a:defRPr>
+            </a:pPr>
+            <a:r>
+              <a:rPr sz="1600" dirty="0"/>
+              <a:t>    Democratico: </a:t>
+            </a:r>
+            <a:r>
+              <a:rPr sz="1600" dirty="0" err="1"/>
+              <a:t>Alastria</a:t>
+            </a:r>
+            <a:r>
+              <a:rPr sz="1600" dirty="0"/>
+              <a:t> (1 </a:t>
+            </a:r>
+            <a:r>
+              <a:rPr sz="1600" dirty="0" err="1"/>
+              <a:t>miembro</a:t>
+            </a:r>
+            <a:r>
+              <a:rPr sz="1600" dirty="0"/>
+              <a:t> = 1 </a:t>
+            </a:r>
+            <a:r>
+              <a:rPr sz="1600" dirty="0" err="1"/>
+              <a:t>voto</a:t>
+            </a:r>
+            <a:r>
+              <a:rPr sz="1600" dirty="0"/>
+              <a:t>).</a:t>
+            </a:r>
+          </a:p>
+          <a:p>
+            <a:pPr lvl="1">
+              <a:spcAft>
+                <a:spcPts val="400"/>
+              </a:spcAft>
+              <a:defRPr sz="1700">
+                <a:solidFill>
+                  <a:srgbClr val="666666"/>
+                </a:solidFill>
+                <a:latin typeface="Calibri"/>
+              </a:defRPr>
+            </a:pPr>
+            <a:r>
+              <a:rPr sz="1600" dirty="0"/>
+              <a:t>    </a:t>
+            </a:r>
+            <a:r>
+              <a:rPr sz="1600" dirty="0" err="1"/>
+              <a:t>Federado</a:t>
+            </a:r>
+            <a:r>
+              <a:rPr sz="1600" dirty="0"/>
+              <a:t>: EBSI (</a:t>
+            </a:r>
+            <a:r>
+              <a:rPr sz="1600" dirty="0" err="1"/>
+              <a:t>comite</a:t>
+            </a:r>
+            <a:r>
+              <a:rPr sz="1600" dirty="0"/>
+              <a:t> </a:t>
+            </a:r>
+            <a:r>
+              <a:rPr sz="1600" dirty="0" err="1"/>
+              <a:t>ejecutivo</a:t>
+            </a:r>
+            <a:r>
+              <a:rPr sz="1600" dirty="0"/>
+              <a:t> </a:t>
+            </a:r>
+            <a:r>
+              <a:rPr sz="1600" dirty="0" err="1"/>
+              <a:t>rotativo</a:t>
+            </a:r>
+            <a:r>
+              <a:rPr sz="1600" dirty="0"/>
+              <a:t>).</a:t>
             </a:r>
           </a:p>
         </p:txBody>
@@ -4184,8 +5554,8 @@
 </p:sld>
 </file>
 
-<file path=ppt/slides/slide5.xml><?xml version="1.0" encoding="utf-8"?>
-<p:sld xmlns:a="http://schemas.openxmlformats.org/drawingml/2006/main" xmlns:p="http://schemas.openxmlformats.org/presentationml/2006/main" xmlns:r="http://schemas.openxmlformats.org/officeDocument/2006/relationships">
+<file path=ppt/slides/slide13.xml><?xml version="1.0" encoding="utf-8"?>
+<p:sld xmlns:a="http://schemas.openxmlformats.org/drawingml/2006/main" xmlns:r="http://schemas.openxmlformats.org/officeDocument/2006/relationships" xmlns:p="http://schemas.openxmlformats.org/presentationml/2006/main">
   <p:cSld>
     <p:spTree>
       <p:nvGrpSpPr>
@@ -4193,7 +5563,14 @@
         <p:cNvGrpSpPr/>
         <p:nvPr/>
       </p:nvGrpSpPr>
-      <p:grpSpPr/>
+      <p:grpSpPr>
+        <a:xfrm>
+          <a:off x="0" y="0"/>
+          <a:ext cx="0" cy="0"/>
+          <a:chOff x="0" y="0"/>
+          <a:chExt cx="0" cy="0"/>
+        </a:xfrm>
+      </p:grpSpPr>
       <p:sp>
         <p:nvSpPr>
           <p:cNvPr id="2" name="Rectangle 1"/>
@@ -4234,6 +5611,7 @@
           <a:lstStyle/>
           <a:p>
             <a:pPr algn="ctr"/>
+            <a:endParaRPr/>
           </a:p>
         </p:txBody>
       </p:sp>
@@ -4266,7 +5644,7 @@
               </a:defRPr>
             </a:pPr>
             <a:r>
-              <a:t>Estimar costes de un proyecto Fabric</a:t>
+              <a:t>Respuestas al repaso del Modulo 3 (2/2)</a:t>
             </a:r>
           </a:p>
         </p:txBody>
@@ -4311,6 +5689,7 @@
           <a:lstStyle/>
           <a:p>
             <a:pPr algn="ctr"/>
+            <a:endParaRPr/>
           </a:p>
         </p:txBody>
       </p:sp>
@@ -4322,8 +5701,8 @@
         </p:nvSpPr>
         <p:spPr>
           <a:xfrm>
-            <a:off x="640080" y="1280160"/>
-            <a:ext cx="10515600" cy="5029200"/>
+            <a:off x="640080" y="1086943"/>
+            <a:ext cx="10515600" cy="4729500"/>
           </a:xfrm>
           <a:prstGeom prst="rect">
             <a:avLst/>
@@ -4348,7 +5727,16 @@
               </a:defRPr>
             </a:pPr>
             <a:r>
-              <a:t>Infraestructura:</a:t>
+              <a:rPr sz="2400" dirty="0"/>
+              <a:t>5. GDPR vs </a:t>
+            </a:r>
+            <a:r>
+              <a:rPr sz="2400" dirty="0" err="1"/>
+              <a:t>inmutabilidad</a:t>
+            </a:r>
+            <a:r>
+              <a:rPr sz="2400" dirty="0"/>
+              <a:t>:</a:t>
             </a:r>
           </a:p>
           <a:p>
@@ -4364,7 +5752,16 @@
               </a:defRPr>
             </a:pPr>
             <a:r>
-              <a:t>    Servidores/cloud para peers, orderers, CAs, CouchDB</a:t>
+              <a:rPr sz="1600" dirty="0"/>
+              <a:t>    Datos </a:t>
+            </a:r>
+            <a:r>
+              <a:rPr sz="1600" dirty="0" err="1"/>
+              <a:t>personales</a:t>
+            </a:r>
+            <a:r>
+              <a:rPr sz="1600" dirty="0"/>
+              <a:t> off-chain. Hash on-chain.</a:t>
             </a:r>
           </a:p>
           <a:p>
@@ -4380,7 +5777,32 @@
               </a:defRPr>
             </a:pPr>
             <a:r>
-              <a:t>    Estimacion: 500-2000 EUR/mes por organizacion (cloud)</a:t>
+              <a:rPr sz="1600" dirty="0"/>
+              <a:t>    Private Data con </a:t>
+            </a:r>
+            <a:r>
+              <a:rPr sz="1600" dirty="0" err="1"/>
+              <a:t>blockToLive</a:t>
+            </a:r>
+            <a:r>
+              <a:rPr sz="1600" dirty="0"/>
+              <a:t> </a:t>
+            </a:r>
+            <a:r>
+              <a:rPr sz="1600" dirty="0" err="1"/>
+              <a:t>caduca</a:t>
+            </a:r>
+            <a:r>
+              <a:rPr sz="1600" dirty="0"/>
+              <a:t> </a:t>
+            </a:r>
+            <a:r>
+              <a:rPr sz="1600" dirty="0" err="1"/>
+              <a:t>datos</a:t>
+            </a:r>
+            <a:r>
+              <a:rPr sz="1600" dirty="0"/>
+              <a:t> privados.</a:t>
             </a:r>
           </a:p>
           <a:p>
@@ -4396,7 +5818,48 @@
               </a:defRPr>
             </a:pPr>
             <a:r>
-              <a:t>    Mas barato on-premise pero requiere equipo de sistemas</a:t>
+              <a:rPr sz="1600" dirty="0"/>
+              <a:t>    </a:t>
+            </a:r>
+            <a:r>
+              <a:rPr sz="1600" dirty="0" err="1"/>
+              <a:t>Borrar</a:t>
+            </a:r>
+            <a:r>
+              <a:rPr sz="1600" dirty="0"/>
+              <a:t> off-chain </a:t>
+            </a:r>
+            <a:r>
+              <a:rPr sz="1600" dirty="0" err="1"/>
+              <a:t>deja</a:t>
+            </a:r>
+            <a:r>
+              <a:rPr sz="1600" dirty="0"/>
+              <a:t> hash </a:t>
+            </a:r>
+            <a:r>
+              <a:rPr sz="1600" dirty="0" err="1"/>
+              <a:t>huerfano</a:t>
+            </a:r>
+            <a:r>
+              <a:rPr sz="1600" dirty="0"/>
+              <a:t> = </a:t>
+            </a:r>
+            <a:r>
+              <a:rPr sz="1600" dirty="0" err="1"/>
+              <a:t>pseudonimizacion</a:t>
+            </a:r>
+            <a:r>
+              <a:rPr sz="1600" dirty="0"/>
+              <a:t> </a:t>
+            </a:r>
+            <a:r>
+              <a:rPr sz="1600" dirty="0" err="1"/>
+              <a:t>efectiva</a:t>
+            </a:r>
+            <a:r>
+              <a:rPr sz="1600" dirty="0"/>
+              <a:t>.</a:t>
             </a:r>
           </a:p>
           <a:p>
@@ -4412,7 +5875,24 @@
               </a:defRPr>
             </a:pPr>
             <a:r>
-              <a:t>Desarrollo:</a:t>
+              <a:rPr sz="2400" dirty="0"/>
+              <a:t>6. </a:t>
+            </a:r>
+            <a:r>
+              <a:rPr sz="2400" dirty="0" err="1"/>
+              <a:t>MiCA</a:t>
+            </a:r>
+            <a:r>
+              <a:rPr sz="2400" dirty="0"/>
+              <a:t> y </a:t>
+            </a:r>
+            <a:r>
+              <a:rPr sz="2400" dirty="0" err="1"/>
+              <a:t>regulacion</a:t>
+            </a:r>
+            <a:r>
+              <a:rPr sz="2400" dirty="0"/>
+              <a:t> de tokens:</a:t>
             </a:r>
           </a:p>
           <a:p>
@@ -4428,7 +5908,32 @@
               </a:defRPr>
             </a:pPr>
             <a:r>
-              <a:t>    Chaincodes: 2-6 meses de desarrollo segun complejidad</a:t>
+              <a:rPr sz="1600" dirty="0"/>
+              <a:t>    </a:t>
+            </a:r>
+            <a:r>
+              <a:rPr sz="1600" dirty="0" err="1"/>
+              <a:t>MiCA</a:t>
+            </a:r>
+            <a:r>
+              <a:rPr sz="1600" dirty="0"/>
+              <a:t> </a:t>
+            </a:r>
+            <a:r>
+              <a:rPr sz="1600" dirty="0" err="1"/>
+              <a:t>aplica</a:t>
+            </a:r>
+            <a:r>
+              <a:rPr sz="1600" dirty="0"/>
+              <a:t> a </a:t>
+            </a:r>
+            <a:r>
+              <a:rPr sz="1600" dirty="0" err="1"/>
+              <a:t>cripto</a:t>
+            </a:r>
+            <a:r>
+              <a:rPr sz="1600" dirty="0"/>
+              <a:t> publica (stablecoins, exchanges, tokens).</a:t>
             </a:r>
           </a:p>
           <a:p>
@@ -4444,7 +5949,40 @@
               </a:defRPr>
             </a:pPr>
             <a:r>
-              <a:t>    Aplicacion cliente: 1-3 meses adicionales</a:t>
+              <a:rPr sz="1600" dirty="0"/>
+              <a:t>    Fabric enterprise SIN tokens </a:t>
+            </a:r>
+            <a:r>
+              <a:rPr sz="1600" dirty="0" err="1"/>
+              <a:t>publicos</a:t>
+            </a:r>
+            <a:r>
+              <a:rPr sz="1600" dirty="0"/>
+              <a:t>: </a:t>
+            </a:r>
+            <a:r>
+              <a:rPr sz="1600" dirty="0" err="1"/>
+              <a:t>menos</a:t>
+            </a:r>
+            <a:r>
+              <a:rPr sz="1600" dirty="0"/>
+              <a:t> </a:t>
+            </a:r>
+            <a:r>
+              <a:rPr sz="1600" dirty="0" err="1"/>
+              <a:t>regulacion</a:t>
+            </a:r>
+            <a:r>
+              <a:rPr sz="1600" dirty="0"/>
+              <a:t> </a:t>
+            </a:r>
+            <a:r>
+              <a:rPr sz="1600" dirty="0" err="1"/>
+              <a:t>directa</a:t>
+            </a:r>
+            <a:r>
+              <a:rPr sz="1600" dirty="0"/>
+              <a:t>.</a:t>
             </a:r>
           </a:p>
           <a:p>
@@ -4460,7 +5998,56 @@
               </a:defRPr>
             </a:pPr>
             <a:r>
-              <a:t>    Integracion con sistemas legacy: el coste mas impredecible</a:t>
+              <a:rPr sz="1600" dirty="0"/>
+              <a:t>    </a:t>
+            </a:r>
+            <a:r>
+              <a:rPr sz="1600" dirty="0" err="1"/>
+              <a:t>Tokenizar</a:t>
+            </a:r>
+            <a:r>
+              <a:rPr sz="1600" dirty="0"/>
+              <a:t> </a:t>
+            </a:r>
+            <a:r>
+              <a:rPr sz="1600" dirty="0" err="1"/>
+              <a:t>valores</a:t>
+            </a:r>
+            <a:r>
+              <a:rPr sz="1600" dirty="0"/>
+              <a:t> (</a:t>
+            </a:r>
+            <a:r>
+              <a:rPr sz="1600" dirty="0" err="1"/>
+              <a:t>bonos</a:t>
+            </a:r>
+            <a:r>
+              <a:rPr sz="1600" dirty="0"/>
+              <a:t>, </a:t>
+            </a:r>
+            <a:r>
+              <a:rPr sz="1600" dirty="0" err="1"/>
+              <a:t>acciones</a:t>
+            </a:r>
+            <a:r>
+              <a:rPr sz="1600" dirty="0"/>
+              <a:t>) </a:t>
+            </a:r>
+            <a:r>
+              <a:rPr sz="1600" dirty="0" err="1"/>
+              <a:t>en</a:t>
+            </a:r>
+            <a:r>
+              <a:rPr sz="1600" dirty="0"/>
+              <a:t> Fabric: MiFID II + </a:t>
+            </a:r>
+            <a:r>
+              <a:rPr sz="1600" dirty="0" err="1"/>
+              <a:t>autorizacion</a:t>
+            </a:r>
+            <a:r>
+              <a:rPr sz="1600" dirty="0"/>
+              <a:t> CNMV.</a:t>
             </a:r>
           </a:p>
           <a:p>
@@ -4476,7 +6063,16 @@
               </a:defRPr>
             </a:pPr>
             <a:r>
-              <a:t>Operaciones:</a:t>
+              <a:rPr sz="2400" dirty="0"/>
+              <a:t>7. </a:t>
+            </a:r>
+            <a:r>
+              <a:rPr sz="2400" dirty="0" err="1"/>
+              <a:t>Metodologia</a:t>
+            </a:r>
+            <a:r>
+              <a:rPr sz="2400" dirty="0"/>
+              <a:t>: de la idea al roadmap:</a:t>
             </a:r>
           </a:p>
           <a:p>
@@ -4492,7 +6088,56 @@
               </a:defRPr>
             </a:pPr>
             <a:r>
-              <a:t>    Administracion de la red: 0.5-1 persona por org</a:t>
+              <a:rPr sz="1600" dirty="0"/>
+              <a:t>    </a:t>
+            </a:r>
+            <a:r>
+              <a:rPr sz="1600" dirty="0" err="1"/>
+              <a:t>Descubrimiento</a:t>
+            </a:r>
+            <a:r>
+              <a:rPr sz="1600" dirty="0"/>
+              <a:t> (1-2 meses): </a:t>
+            </a:r>
+            <a:r>
+              <a:rPr sz="1600" dirty="0" err="1"/>
+              <a:t>problema</a:t>
+            </a:r>
+            <a:r>
+              <a:rPr sz="1600" dirty="0"/>
+              <a:t>, </a:t>
+            </a:r>
+            <a:r>
+              <a:rPr sz="1600" dirty="0" err="1"/>
+              <a:t>validar</a:t>
+            </a:r>
+            <a:r>
+              <a:rPr sz="1600" dirty="0"/>
+              <a:t> </a:t>
+            </a:r>
+            <a:r>
+              <a:rPr sz="1600" dirty="0" err="1"/>
+              <a:t>si</a:t>
+            </a:r>
+            <a:r>
+              <a:rPr sz="1600" dirty="0"/>
+              <a:t> blockchain </a:t>
+            </a:r>
+            <a:r>
+              <a:rPr sz="1600" dirty="0" err="1"/>
+              <a:t>aporta</a:t>
+            </a:r>
+            <a:r>
+              <a:rPr sz="1600" dirty="0"/>
+              <a:t>, </a:t>
+            </a:r>
+            <a:r>
+              <a:rPr sz="1600" dirty="0" err="1"/>
+              <a:t>socios</a:t>
+            </a:r>
+            <a:r>
+              <a:rPr sz="1600" dirty="0"/>
+              <a:t>.</a:t>
             </a:r>
           </a:p>
           <a:p>
@@ -4508,7 +6153,40 @@
               </a:defRPr>
             </a:pPr>
             <a:r>
-              <a:t>    Soporte y mantenimiento: 20-30% del coste de desarrollo anual</a:t>
+              <a:rPr sz="1600" dirty="0"/>
+              <a:t>    PoC (3-4 meses): red minima, </a:t>
+            </a:r>
+            <a:r>
+              <a:rPr sz="1600" dirty="0" err="1"/>
+              <a:t>chaincode</a:t>
+            </a:r>
+            <a:r>
+              <a:rPr sz="1600" dirty="0"/>
+              <a:t> </a:t>
+            </a:r>
+            <a:r>
+              <a:rPr sz="1600" dirty="0" err="1"/>
+              <a:t>basico</a:t>
+            </a:r>
+            <a:r>
+              <a:rPr sz="1600" dirty="0"/>
+              <a:t>, </a:t>
+            </a:r>
+            <a:r>
+              <a:rPr sz="1600" dirty="0" err="1"/>
+              <a:t>demostrar</a:t>
+            </a:r>
+            <a:r>
+              <a:rPr sz="1600" dirty="0"/>
+              <a:t> </a:t>
+            </a:r>
+            <a:r>
+              <a:rPr sz="1600" dirty="0" err="1"/>
+              <a:t>funciona</a:t>
+            </a:r>
+            <a:r>
+              <a:rPr sz="1600" dirty="0"/>
+              <a:t>.</a:t>
             </a:r>
           </a:p>
           <a:p>
@@ -4524,7 +6202,98 @@
               </a:defRPr>
             </a:pPr>
             <a:r>
-              <a:t>    Gobernanza: reuniones, comites, decision-making (tiempo de directivos)</a:t>
+              <a:rPr sz="1600" dirty="0"/>
+              <a:t>    MVP (5-8 meses): red con Fabric CA, </a:t>
+            </a:r>
+            <a:r>
+              <a:rPr sz="1600" dirty="0" err="1"/>
+              <a:t>chaincode</a:t>
+            </a:r>
+            <a:r>
+              <a:rPr sz="1600" dirty="0"/>
+              <a:t> </a:t>
+            </a:r>
+            <a:r>
+              <a:rPr sz="1600" dirty="0" err="1"/>
+              <a:t>completo</a:t>
+            </a:r>
+            <a:r>
+              <a:rPr sz="1600" dirty="0"/>
+              <a:t>, app, tests.</a:t>
+            </a:r>
+          </a:p>
+          <a:p>
+            <a:pPr lvl="1">
+              <a:spcAft>
+                <a:spcPts val="400"/>
+              </a:spcAft>
+              <a:defRPr sz="1700">
+                <a:solidFill>
+                  <a:srgbClr val="666666"/>
+                </a:solidFill>
+                <a:latin typeface="Calibri"/>
+              </a:defRPr>
+            </a:pPr>
+            <a:r>
+              <a:rPr sz="1600" dirty="0"/>
+              <a:t>    Piloto (9-12 meses): </a:t>
+            </a:r>
+            <a:r>
+              <a:rPr sz="1600" dirty="0" err="1"/>
+              <a:t>datos</a:t>
+            </a:r>
+            <a:r>
+              <a:rPr sz="1600" dirty="0"/>
+              <a:t> reales, mas orgs, </a:t>
+            </a:r>
+            <a:r>
+              <a:rPr sz="1600" dirty="0" err="1"/>
+              <a:t>integracion</a:t>
+            </a:r>
+            <a:r>
+              <a:rPr sz="1600" dirty="0"/>
+              <a:t> legacy.</a:t>
+            </a:r>
+          </a:p>
+          <a:p>
+            <a:pPr lvl="1">
+              <a:spcAft>
+                <a:spcPts val="400"/>
+              </a:spcAft>
+              <a:defRPr sz="1700">
+                <a:solidFill>
+                  <a:srgbClr val="666666"/>
+                </a:solidFill>
+                <a:latin typeface="Calibri"/>
+              </a:defRPr>
+            </a:pPr>
+            <a:r>
+              <a:rPr sz="1600" dirty="0"/>
+              <a:t>    </a:t>
+            </a:r>
+            <a:r>
+              <a:rPr sz="1600" dirty="0" err="1"/>
+              <a:t>Produccion</a:t>
+            </a:r>
+            <a:r>
+              <a:rPr sz="1600" dirty="0"/>
+              <a:t> (12+ meses): SLAs, </a:t>
+            </a:r>
+            <a:r>
+              <a:rPr sz="1600" dirty="0" err="1"/>
+              <a:t>monitorizacion</a:t>
+            </a:r>
+            <a:r>
+              <a:rPr sz="1600" dirty="0"/>
+              <a:t>, </a:t>
+            </a:r>
+            <a:r>
+              <a:rPr sz="1600" dirty="0" err="1"/>
+              <a:t>soporte</a:t>
+            </a:r>
+            <a:r>
+              <a:rPr sz="1600" dirty="0"/>
+              <a:t> 24/7.</a:t>
             </a:r>
           </a:p>
         </p:txBody>
@@ -4537,19 +6306,38 @@
 </p:sld>
 </file>
 
-<file path=ppt/slides/slide6.xml><?xml version="1.0" encoding="utf-8"?>
-<p:sld xmlns:a="http://schemas.openxmlformats.org/drawingml/2006/main" xmlns:p="http://schemas.openxmlformats.org/presentationml/2006/main" xmlns:r="http://schemas.openxmlformats.org/officeDocument/2006/relationships">
+<file path=ppt/slides/slide14.xml><?xml version="1.0" encoding="utf-8"?>
+<p:sld xmlns:a="http://schemas.openxmlformats.org/drawingml/2006/main" xmlns:r="http://schemas.openxmlformats.org/officeDocument/2006/relationships" xmlns:p="http://schemas.openxmlformats.org/presentationml/2006/main">
   <p:cSld>
     <p:spTree>
       <p:nvGrpSpPr>
-        <p:cNvPr id="1" name=""/>
+        <p:cNvPr id="1" name="">
+          <a:extLst>
+            <a:ext uri="{FF2B5EF4-FFF2-40B4-BE49-F238E27FC236}">
+              <a16:creationId xmlns:a16="http://schemas.microsoft.com/office/drawing/2014/main" id="{6107540E-4FCC-8D6B-B59F-0763243D73CC}"/>
+            </a:ext>
+          </a:extLst>
+        </p:cNvPr>
         <p:cNvGrpSpPr/>
         <p:nvPr/>
       </p:nvGrpSpPr>
-      <p:grpSpPr/>
-      <p:sp>
-        <p:nvSpPr>
-          <p:cNvPr id="2" name="Rectangle 1"/>
+      <p:grpSpPr>
+        <a:xfrm>
+          <a:off x="0" y="0"/>
+          <a:ext cx="0" cy="0"/>
+          <a:chOff x="0" y="0"/>
+          <a:chExt cx="0" cy="0"/>
+        </a:xfrm>
+      </p:grpSpPr>
+      <p:sp>
+        <p:nvSpPr>
+          <p:cNvPr id="2" name="Rectangle 1">
+            <a:extLst>
+              <a:ext uri="{FF2B5EF4-FFF2-40B4-BE49-F238E27FC236}">
+                <a16:creationId xmlns:a16="http://schemas.microsoft.com/office/drawing/2014/main" id="{0E5D8616-204D-A519-3FF3-3685ACB1F313}"/>
+              </a:ext>
+            </a:extLst>
+          </p:cNvPr>
           <p:cNvSpPr/>
           <p:nvPr/>
         </p:nvSpPr>
@@ -4587,12 +6375,19 @@
           <a:lstStyle/>
           <a:p>
             <a:pPr algn="ctr"/>
-          </a:p>
-        </p:txBody>
-      </p:sp>
-      <p:sp>
-        <p:nvSpPr>
-          <p:cNvPr id="3" name="TextBox 2"/>
+            <a:endParaRPr/>
+          </a:p>
+        </p:txBody>
+      </p:sp>
+      <p:sp>
+        <p:nvSpPr>
+          <p:cNvPr id="3" name="TextBox 2">
+            <a:extLst>
+              <a:ext uri="{FF2B5EF4-FFF2-40B4-BE49-F238E27FC236}">
+                <a16:creationId xmlns:a16="http://schemas.microsoft.com/office/drawing/2014/main" id="{DBCDDF90-6377-B558-75DB-8298984107D9}"/>
+              </a:ext>
+            </a:extLst>
+          </p:cNvPr>
           <p:cNvSpPr txBox="1"/>
           <p:nvPr/>
         </p:nvSpPr>
@@ -4619,14 +6414,20 @@
               </a:defRPr>
             </a:pPr>
             <a:r>
-              <a:t>Roadmap tipico de un proyecto Fabric</a:t>
-            </a:r>
-          </a:p>
-        </p:txBody>
-      </p:sp>
-      <p:sp>
-        <p:nvSpPr>
-          <p:cNvPr id="4" name="Rectangle 3"/>
+              <a:t>Respuestas al repaso del Modulo 3 (2/2)</a:t>
+            </a:r>
+          </a:p>
+        </p:txBody>
+      </p:sp>
+      <p:sp>
+        <p:nvSpPr>
+          <p:cNvPr id="4" name="Rectangle 3">
+            <a:extLst>
+              <a:ext uri="{FF2B5EF4-FFF2-40B4-BE49-F238E27FC236}">
+                <a16:creationId xmlns:a16="http://schemas.microsoft.com/office/drawing/2014/main" id="{781EF763-17A1-6EFE-E1CC-17F419EB24F2}"/>
+              </a:ext>
+            </a:extLst>
+          </p:cNvPr>
           <p:cNvSpPr/>
           <p:nvPr/>
         </p:nvSpPr>
@@ -4664,6 +6465,386 @@
           <a:lstStyle/>
           <a:p>
             <a:pPr algn="ctr"/>
+            <a:endParaRPr/>
+          </a:p>
+        </p:txBody>
+      </p:sp>
+      <p:sp>
+        <p:nvSpPr>
+          <p:cNvPr id="5" name="TextBox 4">
+            <a:extLst>
+              <a:ext uri="{FF2B5EF4-FFF2-40B4-BE49-F238E27FC236}">
+                <a16:creationId xmlns:a16="http://schemas.microsoft.com/office/drawing/2014/main" id="{0CD48B40-931D-DA51-C1D0-07D81F9360A5}"/>
+              </a:ext>
+            </a:extLst>
+          </p:cNvPr>
+          <p:cNvSpPr txBox="1"/>
+          <p:nvPr/>
+        </p:nvSpPr>
+        <p:spPr>
+          <a:xfrm>
+            <a:off x="640080" y="1086943"/>
+            <a:ext cx="10515600" cy="2000548"/>
+          </a:xfrm>
+          <a:prstGeom prst="rect">
+            <a:avLst/>
+          </a:prstGeom>
+          <a:noFill/>
+        </p:spPr>
+        <p:txBody>
+          <a:bodyPr wrap="square">
+            <a:spAutoFit/>
+          </a:bodyPr>
+          <a:lstStyle/>
+          <a:p>
+            <a:pPr>
+              <a:spcAft>
+                <a:spcPts val="800"/>
+              </a:spcAft>
+              <a:defRPr sz="2000">
+                <a:solidFill>
+                  <a:srgbClr val="333333"/>
+                </a:solidFill>
+                <a:latin typeface="Calibri"/>
+              </a:defRPr>
+            </a:pPr>
+            <a:r>
+              <a:rPr lang="es-ES" sz="2400" dirty="0"/>
+              <a:t>8. Costes </a:t>
+            </a:r>
+            <a:r>
+              <a:rPr lang="es-ES" sz="2400" dirty="0" err="1"/>
+              <a:t>tipicos</a:t>
+            </a:r>
+            <a:r>
+              <a:rPr lang="es-ES" sz="2400" dirty="0"/>
+              <a:t> de un proyecto </a:t>
+            </a:r>
+            <a:r>
+              <a:rPr lang="es-ES" sz="2400" dirty="0" err="1"/>
+              <a:t>Fabric</a:t>
+            </a:r>
+            <a:r>
+              <a:rPr lang="es-ES" sz="2400" dirty="0"/>
+              <a:t>:</a:t>
+            </a:r>
+          </a:p>
+          <a:p>
+            <a:pPr lvl="1">
+              <a:spcAft>
+                <a:spcPts val="400"/>
+              </a:spcAft>
+              <a:defRPr sz="1700">
+                <a:solidFill>
+                  <a:srgbClr val="666666"/>
+                </a:solidFill>
+                <a:latin typeface="Calibri"/>
+              </a:defRPr>
+            </a:pPr>
+            <a:r>
+              <a:rPr lang="es-ES" sz="1600" dirty="0"/>
+              <a:t>    Infraestructura: 500-2000€/mes por </a:t>
+            </a:r>
+            <a:r>
+              <a:rPr lang="es-ES" sz="1600" dirty="0" err="1"/>
+              <a:t>org</a:t>
+            </a:r>
+            <a:r>
+              <a:rPr lang="es-ES" sz="1600" dirty="0"/>
+              <a:t> (</a:t>
+            </a:r>
+            <a:r>
+              <a:rPr lang="es-ES" sz="1600" dirty="0" err="1"/>
+              <a:t>cloud</a:t>
+            </a:r>
+            <a:r>
+              <a:rPr lang="es-ES" sz="1600" dirty="0"/>
+              <a:t>), menos </a:t>
+            </a:r>
+            <a:r>
+              <a:rPr lang="es-ES" sz="1600" dirty="0" err="1"/>
+              <a:t>on</a:t>
+            </a:r>
+            <a:r>
+              <a:rPr lang="es-ES" sz="1600" dirty="0"/>
+              <a:t>-premise.</a:t>
+            </a:r>
+          </a:p>
+          <a:p>
+            <a:pPr lvl="1">
+              <a:spcAft>
+                <a:spcPts val="400"/>
+              </a:spcAft>
+              <a:defRPr sz="1700">
+                <a:solidFill>
+                  <a:srgbClr val="666666"/>
+                </a:solidFill>
+                <a:latin typeface="Calibri"/>
+              </a:defRPr>
+            </a:pPr>
+            <a:r>
+              <a:rPr lang="es-ES" sz="1600" dirty="0"/>
+              <a:t>    Desarrollo: </a:t>
+            </a:r>
+            <a:r>
+              <a:rPr lang="es-ES" sz="1600" dirty="0" err="1"/>
+              <a:t>chaincode</a:t>
+            </a:r>
+            <a:r>
+              <a:rPr lang="es-ES" sz="1600" dirty="0"/>
+              <a:t> 2-6 meses + app cliente 1-3 meses.</a:t>
+            </a:r>
+          </a:p>
+          <a:p>
+            <a:pPr lvl="1">
+              <a:spcAft>
+                <a:spcPts val="400"/>
+              </a:spcAft>
+              <a:defRPr sz="1700">
+                <a:solidFill>
+                  <a:srgbClr val="666666"/>
+                </a:solidFill>
+                <a:latin typeface="Calibri"/>
+              </a:defRPr>
+            </a:pPr>
+            <a:r>
+              <a:rPr lang="es-ES" sz="1600" dirty="0"/>
+              <a:t>    </a:t>
+            </a:r>
+            <a:r>
+              <a:rPr lang="es-ES" sz="1600" dirty="0" err="1"/>
+              <a:t>Integracion</a:t>
+            </a:r>
+            <a:r>
+              <a:rPr lang="es-ES" sz="1600" dirty="0"/>
+              <a:t> con </a:t>
+            </a:r>
+            <a:r>
+              <a:rPr lang="es-ES" sz="1600" dirty="0" err="1"/>
+              <a:t>legacy</a:t>
+            </a:r>
+            <a:r>
+              <a:rPr lang="es-ES" sz="1600" dirty="0"/>
+              <a:t>: el coste mas impredecible (depende del sistema).</a:t>
+            </a:r>
+          </a:p>
+          <a:p>
+            <a:pPr lvl="1">
+              <a:spcAft>
+                <a:spcPts val="400"/>
+              </a:spcAft>
+              <a:defRPr sz="1700">
+                <a:solidFill>
+                  <a:srgbClr val="666666"/>
+                </a:solidFill>
+                <a:latin typeface="Calibri"/>
+              </a:defRPr>
+            </a:pPr>
+            <a:r>
+              <a:rPr lang="es-ES" sz="1600" dirty="0"/>
+              <a:t>    Operaciones: 0.5-1 persona por </a:t>
+            </a:r>
+            <a:r>
+              <a:rPr lang="es-ES" sz="1600" dirty="0" err="1"/>
+              <a:t>org</a:t>
+            </a:r>
+            <a:r>
+              <a:rPr lang="es-ES" sz="1600" dirty="0"/>
+              <a:t> + 20-30% del </a:t>
+            </a:r>
+            <a:r>
+              <a:rPr lang="es-ES" sz="1600" dirty="0" err="1"/>
+              <a:t>dev</a:t>
+            </a:r>
+            <a:r>
+              <a:rPr lang="es-ES" sz="1600" dirty="0"/>
+              <a:t>/ano mantenimiento.</a:t>
+            </a:r>
+          </a:p>
+          <a:p>
+            <a:pPr lvl="1">
+              <a:spcAft>
+                <a:spcPts val="400"/>
+              </a:spcAft>
+              <a:defRPr sz="1700">
+                <a:solidFill>
+                  <a:srgbClr val="666666"/>
+                </a:solidFill>
+                <a:latin typeface="Calibri"/>
+              </a:defRPr>
+            </a:pPr>
+            <a:r>
+              <a:rPr lang="es-ES" sz="1600" dirty="0"/>
+              <a:t>    Gobernanza: reuniones, </a:t>
+            </a:r>
+            <a:r>
+              <a:rPr lang="es-ES" sz="1600" dirty="0" err="1"/>
+              <a:t>comites</a:t>
+            </a:r>
+            <a:r>
+              <a:rPr lang="es-ES" sz="1600" dirty="0"/>
+              <a:t>, </a:t>
+            </a:r>
+            <a:r>
+              <a:rPr lang="es-ES" sz="1600" dirty="0" err="1"/>
+              <a:t>decision-making</a:t>
+            </a:r>
+            <a:r>
+              <a:rPr lang="es-ES" sz="1600" dirty="0"/>
+              <a:t> (tiempo directivos).</a:t>
+            </a:r>
+          </a:p>
+        </p:txBody>
+      </p:sp>
+    </p:spTree>
+    <p:extLst>
+      <p:ext uri="{BB962C8B-B14F-4D97-AF65-F5344CB8AC3E}">
+        <p14:creationId xmlns:p14="http://schemas.microsoft.com/office/powerpoint/2010/main" val="13319538"/>
+      </p:ext>
+    </p:extLst>
+  </p:cSld>
+  <p:clrMapOvr>
+    <a:masterClrMapping/>
+  </p:clrMapOvr>
+</p:sld>
+</file>
+
+<file path=ppt/slides/slide2.xml><?xml version="1.0" encoding="utf-8"?>
+<p:sld xmlns:a="http://schemas.openxmlformats.org/drawingml/2006/main" xmlns:r="http://schemas.openxmlformats.org/officeDocument/2006/relationships" xmlns:p="http://schemas.openxmlformats.org/presentationml/2006/main">
+  <p:cSld>
+    <p:spTree>
+      <p:nvGrpSpPr>
+        <p:cNvPr id="1" name=""/>
+        <p:cNvGrpSpPr/>
+        <p:nvPr/>
+      </p:nvGrpSpPr>
+      <p:grpSpPr>
+        <a:xfrm>
+          <a:off x="0" y="0"/>
+          <a:ext cx="0" cy="0"/>
+          <a:chOff x="0" y="0"/>
+          <a:chExt cx="0" cy="0"/>
+        </a:xfrm>
+      </p:grpSpPr>
+      <p:sp>
+        <p:nvSpPr>
+          <p:cNvPr id="2" name="Rectangle 1"/>
+          <p:cNvSpPr/>
+          <p:nvPr/>
+        </p:nvSpPr>
+        <p:spPr>
+          <a:xfrm>
+            <a:off x="0" y="0"/>
+            <a:ext cx="12188952" cy="73152"/>
+          </a:xfrm>
+          <a:prstGeom prst="rect">
+            <a:avLst/>
+          </a:prstGeom>
+          <a:solidFill>
+            <a:srgbClr val="22627E"/>
+          </a:solidFill>
+          <a:ln>
+            <a:noFill/>
+          </a:ln>
+        </p:spPr>
+        <p:style>
+          <a:lnRef idx="1">
+            <a:schemeClr val="accent1"/>
+          </a:lnRef>
+          <a:fillRef idx="3">
+            <a:schemeClr val="accent1"/>
+          </a:fillRef>
+          <a:effectRef idx="2">
+            <a:schemeClr val="accent1"/>
+          </a:effectRef>
+          <a:fontRef idx="minor">
+            <a:schemeClr val="lt1"/>
+          </a:fontRef>
+        </p:style>
+        <p:txBody>
+          <a:bodyPr rtlCol="0" anchor="ctr"/>
+          <a:lstStyle/>
+          <a:p>
+            <a:pPr algn="ctr"/>
+            <a:endParaRPr/>
+          </a:p>
+        </p:txBody>
+      </p:sp>
+      <p:sp>
+        <p:nvSpPr>
+          <p:cNvPr id="3" name="TextBox 2"/>
+          <p:cNvSpPr txBox="1"/>
+          <p:nvPr/>
+        </p:nvSpPr>
+        <p:spPr>
+          <a:xfrm>
+            <a:off x="457200" y="274320"/>
+            <a:ext cx="10972800" cy="731520"/>
+          </a:xfrm>
+          <a:prstGeom prst="rect">
+            <a:avLst/>
+          </a:prstGeom>
+          <a:noFill/>
+        </p:spPr>
+        <p:txBody>
+          <a:bodyPr wrap="square"/>
+          <a:lstStyle/>
+          <a:p>
+            <a:pPr algn="l">
+              <a:defRPr sz="3200" b="1">
+                <a:solidFill>
+                  <a:srgbClr val="22627E"/>
+                </a:solidFill>
+                <a:latin typeface="Calibri"/>
+              </a:defRPr>
+            </a:pPr>
+            <a:r>
+              <a:t>Metodologia: de la idea al proyecto</a:t>
+            </a:r>
+          </a:p>
+        </p:txBody>
+      </p:sp>
+      <p:sp>
+        <p:nvSpPr>
+          <p:cNvPr id="4" name="Rectangle 3"/>
+          <p:cNvSpPr/>
+          <p:nvPr/>
+        </p:nvSpPr>
+        <p:spPr>
+          <a:xfrm>
+            <a:off x="457200" y="1051560"/>
+            <a:ext cx="10972800" cy="27432"/>
+          </a:xfrm>
+          <a:prstGeom prst="rect">
+            <a:avLst/>
+          </a:prstGeom>
+          <a:solidFill>
+            <a:srgbClr val="22627E"/>
+          </a:solidFill>
+          <a:ln>
+            <a:noFill/>
+          </a:ln>
+        </p:spPr>
+        <p:style>
+          <a:lnRef idx="1">
+            <a:schemeClr val="accent1"/>
+          </a:lnRef>
+          <a:fillRef idx="3">
+            <a:schemeClr val="accent1"/>
+          </a:fillRef>
+          <a:effectRef idx="2">
+            <a:schemeClr val="accent1"/>
+          </a:effectRef>
+          <a:fontRef idx="minor">
+            <a:schemeClr val="lt1"/>
+          </a:fontRef>
+        </p:style>
+        <p:txBody>
+          <a:bodyPr rtlCol="0" anchor="ctr"/>
+          <a:lstStyle/>
+          <a:p>
+            <a:pPr algn="ctr"/>
+            <a:endParaRPr/>
           </a:p>
         </p:txBody>
       </p:sp>
@@ -4701,6 +6882,1125 @@
               </a:defRPr>
             </a:pPr>
             <a:r>
+              <a:t>1. Identificar el problema (dia 2): ¿que duele? ¿a quien? ¿cuanto cuesta?</a:t>
+            </a:r>
+          </a:p>
+          <a:p>
+            <a:pPr>
+              <a:spcAft>
+                <a:spcPts val="800"/>
+              </a:spcAft>
+              <a:defRPr sz="2000">
+                <a:solidFill>
+                  <a:srgbClr val="333333"/>
+                </a:solidFill>
+                <a:latin typeface="Calibri"/>
+              </a:defRPr>
+            </a:pPr>
+            <a:r>
+              <a:t>2. Validar que blockchain aporta (dia 1): arbol de decision</a:t>
+            </a:r>
+          </a:p>
+          <a:p>
+            <a:pPr>
+              <a:spcAft>
+                <a:spcPts val="800"/>
+              </a:spcAft>
+              <a:defRPr sz="2000">
+                <a:solidFill>
+                  <a:srgbClr val="333333"/>
+                </a:solidFill>
+                <a:latin typeface="Calibri"/>
+              </a:defRPr>
+            </a:pPr>
+            <a:r>
+              <a:t>3. Definir el consorcio: quienes participan, que rol tiene cada uno</a:t>
+            </a:r>
+          </a:p>
+          <a:p>
+            <a:pPr>
+              <a:spcAft>
+                <a:spcPts val="800"/>
+              </a:spcAft>
+              <a:defRPr sz="2000">
+                <a:solidFill>
+                  <a:srgbClr val="333333"/>
+                </a:solidFill>
+                <a:latin typeface="Calibri"/>
+              </a:defRPr>
+            </a:pPr>
+            <a:r>
+              <a:t>4. Disenar la gobernanza (dia 3): politicas, costes, onboarding</a:t>
+            </a:r>
+          </a:p>
+          <a:p>
+            <a:pPr>
+              <a:spcAft>
+                <a:spcPts val="800"/>
+              </a:spcAft>
+              <a:defRPr sz="2000">
+                <a:solidFill>
+                  <a:srgbClr val="333333"/>
+                </a:solidFill>
+                <a:latin typeface="Calibri"/>
+              </a:defRPr>
+            </a:pPr>
+            <a:r>
+              <a:t>5. Disenar la red Fabric: organizaciones, canales, datos</a:t>
+            </a:r>
+          </a:p>
+          <a:p>
+            <a:pPr>
+              <a:spcAft>
+                <a:spcPts val="800"/>
+              </a:spcAft>
+              <a:defRPr sz="2000">
+                <a:solidFill>
+                  <a:srgbClr val="333333"/>
+                </a:solidFill>
+                <a:latin typeface="Calibri"/>
+              </a:defRPr>
+            </a:pPr>
+            <a:r>
+              <a:t>6. Definir el MVP: empezar pequeno, demostrar valor</a:t>
+            </a:r>
+          </a:p>
+          <a:p>
+            <a:pPr>
+              <a:spcAft>
+                <a:spcPts val="800"/>
+              </a:spcAft>
+              <a:defRPr sz="2000">
+                <a:solidFill>
+                  <a:srgbClr val="333333"/>
+                </a:solidFill>
+                <a:latin typeface="Calibri"/>
+              </a:defRPr>
+            </a:pPr>
+            <a:r>
+              <a:t>7. Planificar: roadmap, equipo, presupuesto, riesgos</a:t>
+            </a:r>
+          </a:p>
+        </p:txBody>
+      </p:sp>
+    </p:spTree>
+  </p:cSld>
+  <p:clrMapOvr>
+    <a:masterClrMapping/>
+  </p:clrMapOvr>
+</p:sld>
+</file>
+
+<file path=ppt/slides/slide3.xml><?xml version="1.0" encoding="utf-8"?>
+<p:sld xmlns:a="http://schemas.openxmlformats.org/drawingml/2006/main" xmlns:r="http://schemas.openxmlformats.org/officeDocument/2006/relationships" xmlns:p="http://schemas.openxmlformats.org/presentationml/2006/main">
+  <p:cSld>
+    <p:spTree>
+      <p:nvGrpSpPr>
+        <p:cNvPr id="1" name=""/>
+        <p:cNvGrpSpPr/>
+        <p:nvPr/>
+      </p:nvGrpSpPr>
+      <p:grpSpPr>
+        <a:xfrm>
+          <a:off x="0" y="0"/>
+          <a:ext cx="0" cy="0"/>
+          <a:chOff x="0" y="0"/>
+          <a:chExt cx="0" cy="0"/>
+        </a:xfrm>
+      </p:grpSpPr>
+      <p:sp>
+        <p:nvSpPr>
+          <p:cNvPr id="2" name="Rectangle 1"/>
+          <p:cNvSpPr/>
+          <p:nvPr/>
+        </p:nvSpPr>
+        <p:spPr>
+          <a:xfrm>
+            <a:off x="0" y="0"/>
+            <a:ext cx="12188952" cy="73152"/>
+          </a:xfrm>
+          <a:prstGeom prst="rect">
+            <a:avLst/>
+          </a:prstGeom>
+          <a:solidFill>
+            <a:srgbClr val="22627E"/>
+          </a:solidFill>
+          <a:ln>
+            <a:noFill/>
+          </a:ln>
+        </p:spPr>
+        <p:style>
+          <a:lnRef idx="1">
+            <a:schemeClr val="accent1"/>
+          </a:lnRef>
+          <a:fillRef idx="3">
+            <a:schemeClr val="accent1"/>
+          </a:fillRef>
+          <a:effectRef idx="2">
+            <a:schemeClr val="accent1"/>
+          </a:effectRef>
+          <a:fontRef idx="minor">
+            <a:schemeClr val="lt1"/>
+          </a:fontRef>
+        </p:style>
+        <p:txBody>
+          <a:bodyPr rtlCol="0" anchor="ctr"/>
+          <a:lstStyle/>
+          <a:p>
+            <a:pPr algn="ctr"/>
+            <a:endParaRPr/>
+          </a:p>
+        </p:txBody>
+      </p:sp>
+      <p:sp>
+        <p:nvSpPr>
+          <p:cNvPr id="3" name="TextBox 2"/>
+          <p:cNvSpPr txBox="1"/>
+          <p:nvPr/>
+        </p:nvSpPr>
+        <p:spPr>
+          <a:xfrm>
+            <a:off x="457200" y="274320"/>
+            <a:ext cx="10972800" cy="731520"/>
+          </a:xfrm>
+          <a:prstGeom prst="rect">
+            <a:avLst/>
+          </a:prstGeom>
+          <a:noFill/>
+        </p:spPr>
+        <p:txBody>
+          <a:bodyPr wrap="square"/>
+          <a:lstStyle/>
+          <a:p>
+            <a:pPr algn="l">
+              <a:defRPr sz="3200" b="1">
+                <a:solidFill>
+                  <a:srgbClr val="22627E"/>
+                </a:solidFill>
+                <a:latin typeface="Calibri"/>
+              </a:defRPr>
+            </a:pPr>
+            <a:r>
+              <a:t>Disenar la red: preguntas clave</a:t>
+            </a:r>
+          </a:p>
+        </p:txBody>
+      </p:sp>
+      <p:sp>
+        <p:nvSpPr>
+          <p:cNvPr id="4" name="Rectangle 3"/>
+          <p:cNvSpPr/>
+          <p:nvPr/>
+        </p:nvSpPr>
+        <p:spPr>
+          <a:xfrm>
+            <a:off x="457200" y="1051560"/>
+            <a:ext cx="10972800" cy="27432"/>
+          </a:xfrm>
+          <a:prstGeom prst="rect">
+            <a:avLst/>
+          </a:prstGeom>
+          <a:solidFill>
+            <a:srgbClr val="22627E"/>
+          </a:solidFill>
+          <a:ln>
+            <a:noFill/>
+          </a:ln>
+        </p:spPr>
+        <p:style>
+          <a:lnRef idx="1">
+            <a:schemeClr val="accent1"/>
+          </a:lnRef>
+          <a:fillRef idx="3">
+            <a:schemeClr val="accent1"/>
+          </a:fillRef>
+          <a:effectRef idx="2">
+            <a:schemeClr val="accent1"/>
+          </a:effectRef>
+          <a:fontRef idx="minor">
+            <a:schemeClr val="lt1"/>
+          </a:fontRef>
+        </p:style>
+        <p:txBody>
+          <a:bodyPr rtlCol="0" anchor="ctr"/>
+          <a:lstStyle/>
+          <a:p>
+            <a:pPr algn="ctr"/>
+            <a:endParaRPr/>
+          </a:p>
+        </p:txBody>
+      </p:sp>
+      <p:sp>
+        <p:nvSpPr>
+          <p:cNvPr id="5" name="TextBox 4"/>
+          <p:cNvSpPr txBox="1"/>
+          <p:nvPr/>
+        </p:nvSpPr>
+        <p:spPr>
+          <a:xfrm>
+            <a:off x="640080" y="1280160"/>
+            <a:ext cx="10515600" cy="5029200"/>
+          </a:xfrm>
+          <a:prstGeom prst="rect">
+            <a:avLst/>
+          </a:prstGeom>
+          <a:noFill/>
+        </p:spPr>
+        <p:txBody>
+          <a:bodyPr wrap="square">
+            <a:spAutoFit/>
+          </a:bodyPr>
+          <a:lstStyle/>
+          <a:p>
+            <a:pPr>
+              <a:spcAft>
+                <a:spcPts val="800"/>
+              </a:spcAft>
+              <a:defRPr sz="2000">
+                <a:solidFill>
+                  <a:srgbClr val="333333"/>
+                </a:solidFill>
+                <a:latin typeface="Calibri"/>
+              </a:defRPr>
+            </a:pPr>
+            <a:r>
+              <a:t>¿Cuantas organizaciones? ¿Cada una tiene su propio peer?</a:t>
+            </a:r>
+          </a:p>
+          <a:p>
+            <a:pPr>
+              <a:spcAft>
+                <a:spcPts val="800"/>
+              </a:spcAft>
+              <a:defRPr sz="2000">
+                <a:solidFill>
+                  <a:srgbClr val="333333"/>
+                </a:solidFill>
+                <a:latin typeface="Calibri"/>
+              </a:defRPr>
+            </a:pPr>
+            <a:r>
+              <a:t>¿Cuantos canales? ¿Todas las orgs comparten todo o hay datos segregados?</a:t>
+            </a:r>
+          </a:p>
+          <a:p>
+            <a:pPr>
+              <a:spcAft>
+                <a:spcPts val="800"/>
+              </a:spcAft>
+              <a:defRPr sz="2000">
+                <a:solidFill>
+                  <a:srgbClr val="333333"/>
+                </a:solidFill>
+                <a:latin typeface="Calibri"/>
+              </a:defRPr>
+            </a:pPr>
+            <a:r>
+              <a:t>¿Que datos van on-chain y cuales off-chain?</a:t>
+            </a:r>
+          </a:p>
+          <a:p>
+            <a:pPr>
+              <a:spcAft>
+                <a:spcPts val="800"/>
+              </a:spcAft>
+              <a:defRPr sz="2000">
+                <a:solidFill>
+                  <a:srgbClr val="333333"/>
+                </a:solidFill>
+                <a:latin typeface="Calibri"/>
+              </a:defRPr>
+            </a:pPr>
+            <a:r>
+              <a:t>¿Private Data Collections o canales separados para datos confidenciales?</a:t>
+            </a:r>
+          </a:p>
+          <a:p>
+            <a:pPr>
+              <a:spcAft>
+                <a:spcPts val="800"/>
+              </a:spcAft>
+              <a:defRPr sz="2000">
+                <a:solidFill>
+                  <a:srgbClr val="333333"/>
+                </a:solidFill>
+                <a:latin typeface="Calibri"/>
+              </a:defRPr>
+            </a:pPr>
+            <a:r>
+              <a:t>¿CouchDB (rich queries) o LevelDB (rendimiento)?</a:t>
+            </a:r>
+          </a:p>
+          <a:p>
+            <a:pPr>
+              <a:spcAft>
+                <a:spcPts val="800"/>
+              </a:spcAft>
+              <a:defRPr sz="2000">
+                <a:solidFill>
+                  <a:srgbClr val="333333"/>
+                </a:solidFill>
+                <a:latin typeface="Calibri"/>
+              </a:defRPr>
+            </a:pPr>
+            <a:r>
+              <a:t>¿Cuantos orderers? ¿Quien los opera?</a:t>
+            </a:r>
+          </a:p>
+          <a:p>
+            <a:pPr>
+              <a:spcAft>
+                <a:spcPts val="800"/>
+              </a:spcAft>
+              <a:defRPr sz="2000">
+                <a:solidFill>
+                  <a:srgbClr val="333333"/>
+                </a:solidFill>
+                <a:latin typeface="Calibri"/>
+              </a:defRPr>
+            </a:pPr>
+            <a:r>
+              <a:t>¿cryptogen (piloto) o Fabric CA (produccion)?</a:t>
+            </a:r>
+          </a:p>
+          <a:p>
+            <a:pPr>
+              <a:spcAft>
+                <a:spcPts val="800"/>
+              </a:spcAft>
+              <a:defRPr sz="2000">
+                <a:solidFill>
+                  <a:srgbClr val="333333"/>
+                </a:solidFill>
+                <a:latin typeface="Calibri"/>
+              </a:defRPr>
+            </a:pPr>
+            <a:r>
+              <a:t>¿On-premise o cloud (AWS, Azure, IBM)?</a:t>
+            </a:r>
+          </a:p>
+        </p:txBody>
+      </p:sp>
+    </p:spTree>
+  </p:cSld>
+  <p:clrMapOvr>
+    <a:masterClrMapping/>
+  </p:clrMapOvr>
+</p:sld>
+</file>
+
+<file path=ppt/slides/slide4.xml><?xml version="1.0" encoding="utf-8"?>
+<p:sld xmlns:a="http://schemas.openxmlformats.org/drawingml/2006/main" xmlns:r="http://schemas.openxmlformats.org/officeDocument/2006/relationships" xmlns:p="http://schemas.openxmlformats.org/presentationml/2006/main">
+  <p:cSld>
+    <p:spTree>
+      <p:nvGrpSpPr>
+        <p:cNvPr id="1" name=""/>
+        <p:cNvGrpSpPr/>
+        <p:nvPr/>
+      </p:nvGrpSpPr>
+      <p:grpSpPr>
+        <a:xfrm>
+          <a:off x="0" y="0"/>
+          <a:ext cx="0" cy="0"/>
+          <a:chOff x="0" y="0"/>
+          <a:chExt cx="0" cy="0"/>
+        </a:xfrm>
+      </p:grpSpPr>
+      <p:sp>
+        <p:nvSpPr>
+          <p:cNvPr id="2" name="Rectangle 1"/>
+          <p:cNvSpPr/>
+          <p:nvPr/>
+        </p:nvSpPr>
+        <p:spPr>
+          <a:xfrm>
+            <a:off x="0" y="0"/>
+            <a:ext cx="12188952" cy="73152"/>
+          </a:xfrm>
+          <a:prstGeom prst="rect">
+            <a:avLst/>
+          </a:prstGeom>
+          <a:solidFill>
+            <a:srgbClr val="22627E"/>
+          </a:solidFill>
+          <a:ln>
+            <a:noFill/>
+          </a:ln>
+        </p:spPr>
+        <p:style>
+          <a:lnRef idx="1">
+            <a:schemeClr val="accent1"/>
+          </a:lnRef>
+          <a:fillRef idx="3">
+            <a:schemeClr val="accent1"/>
+          </a:fillRef>
+          <a:effectRef idx="2">
+            <a:schemeClr val="accent1"/>
+          </a:effectRef>
+          <a:fontRef idx="minor">
+            <a:schemeClr val="lt1"/>
+          </a:fontRef>
+        </p:style>
+        <p:txBody>
+          <a:bodyPr rtlCol="0" anchor="ctr"/>
+          <a:lstStyle/>
+          <a:p>
+            <a:pPr algn="ctr"/>
+            <a:endParaRPr/>
+          </a:p>
+        </p:txBody>
+      </p:sp>
+      <p:sp>
+        <p:nvSpPr>
+          <p:cNvPr id="3" name="TextBox 2"/>
+          <p:cNvSpPr txBox="1"/>
+          <p:nvPr/>
+        </p:nvSpPr>
+        <p:spPr>
+          <a:xfrm>
+            <a:off x="457200" y="274320"/>
+            <a:ext cx="10972800" cy="731520"/>
+          </a:xfrm>
+          <a:prstGeom prst="rect">
+            <a:avLst/>
+          </a:prstGeom>
+          <a:noFill/>
+        </p:spPr>
+        <p:txBody>
+          <a:bodyPr wrap="square"/>
+          <a:lstStyle/>
+          <a:p>
+            <a:pPr algn="l">
+              <a:defRPr sz="3200" b="1">
+                <a:solidFill>
+                  <a:srgbClr val="22627E"/>
+                </a:solidFill>
+                <a:latin typeface="Calibri"/>
+              </a:defRPr>
+            </a:pPr>
+            <a:r>
+              <a:t>Template: topologia de red Fabric</a:t>
+            </a:r>
+          </a:p>
+        </p:txBody>
+      </p:sp>
+      <p:sp>
+        <p:nvSpPr>
+          <p:cNvPr id="4" name="Rectangle 3"/>
+          <p:cNvSpPr/>
+          <p:nvPr/>
+        </p:nvSpPr>
+        <p:spPr>
+          <a:xfrm>
+            <a:off x="457200" y="1051560"/>
+            <a:ext cx="10972800" cy="27432"/>
+          </a:xfrm>
+          <a:prstGeom prst="rect">
+            <a:avLst/>
+          </a:prstGeom>
+          <a:solidFill>
+            <a:srgbClr val="22627E"/>
+          </a:solidFill>
+          <a:ln>
+            <a:noFill/>
+          </a:ln>
+        </p:spPr>
+        <p:style>
+          <a:lnRef idx="1">
+            <a:schemeClr val="accent1"/>
+          </a:lnRef>
+          <a:fillRef idx="3">
+            <a:schemeClr val="accent1"/>
+          </a:fillRef>
+          <a:effectRef idx="2">
+            <a:schemeClr val="accent1"/>
+          </a:effectRef>
+          <a:fontRef idx="minor">
+            <a:schemeClr val="lt1"/>
+          </a:fontRef>
+        </p:style>
+        <p:txBody>
+          <a:bodyPr rtlCol="0" anchor="ctr"/>
+          <a:lstStyle/>
+          <a:p>
+            <a:pPr algn="ctr"/>
+            <a:endParaRPr/>
+          </a:p>
+        </p:txBody>
+      </p:sp>
+      <p:pic>
+        <p:nvPicPr>
+          <p:cNvPr id="11" name="Imagen 10">
+            <a:extLst>
+              <a:ext uri="{FF2B5EF4-FFF2-40B4-BE49-F238E27FC236}">
+                <a16:creationId xmlns:a16="http://schemas.microsoft.com/office/drawing/2014/main" id="{6A672EF5-4DDE-A5F4-EFBA-46395DD7B29E}"/>
+              </a:ext>
+            </a:extLst>
+          </p:cNvPr>
+          <p:cNvPicPr>
+            <a:picLocks noChangeAspect="1"/>
+          </p:cNvPicPr>
+          <p:nvPr/>
+        </p:nvPicPr>
+        <p:blipFill>
+          <a:blip r:embed="rId2"/>
+          <a:stretch>
+            <a:fillRect/>
+          </a:stretch>
+        </p:blipFill>
+        <p:spPr>
+          <a:xfrm>
+            <a:off x="2138638" y="1406382"/>
+            <a:ext cx="7609924" cy="4983490"/>
+          </a:xfrm>
+          <a:prstGeom prst="rect">
+            <a:avLst/>
+          </a:prstGeom>
+        </p:spPr>
+      </p:pic>
+    </p:spTree>
+  </p:cSld>
+  <p:clrMapOvr>
+    <a:masterClrMapping/>
+  </p:clrMapOvr>
+</p:sld>
+</file>
+
+<file path=ppt/slides/slide5.xml><?xml version="1.0" encoding="utf-8"?>
+<p:sld xmlns:a="http://schemas.openxmlformats.org/drawingml/2006/main" xmlns:r="http://schemas.openxmlformats.org/officeDocument/2006/relationships" xmlns:p="http://schemas.openxmlformats.org/presentationml/2006/main">
+  <p:cSld>
+    <p:spTree>
+      <p:nvGrpSpPr>
+        <p:cNvPr id="1" name=""/>
+        <p:cNvGrpSpPr/>
+        <p:nvPr/>
+      </p:nvGrpSpPr>
+      <p:grpSpPr>
+        <a:xfrm>
+          <a:off x="0" y="0"/>
+          <a:ext cx="0" cy="0"/>
+          <a:chOff x="0" y="0"/>
+          <a:chExt cx="0" cy="0"/>
+        </a:xfrm>
+      </p:grpSpPr>
+      <p:sp>
+        <p:nvSpPr>
+          <p:cNvPr id="2" name="Rectangle 1"/>
+          <p:cNvSpPr/>
+          <p:nvPr/>
+        </p:nvSpPr>
+        <p:spPr>
+          <a:xfrm>
+            <a:off x="0" y="0"/>
+            <a:ext cx="12188952" cy="73152"/>
+          </a:xfrm>
+          <a:prstGeom prst="rect">
+            <a:avLst/>
+          </a:prstGeom>
+          <a:solidFill>
+            <a:srgbClr val="22627E"/>
+          </a:solidFill>
+          <a:ln>
+            <a:noFill/>
+          </a:ln>
+        </p:spPr>
+        <p:style>
+          <a:lnRef idx="1">
+            <a:schemeClr val="accent1"/>
+          </a:lnRef>
+          <a:fillRef idx="3">
+            <a:schemeClr val="accent1"/>
+          </a:fillRef>
+          <a:effectRef idx="2">
+            <a:schemeClr val="accent1"/>
+          </a:effectRef>
+          <a:fontRef idx="minor">
+            <a:schemeClr val="lt1"/>
+          </a:fontRef>
+        </p:style>
+        <p:txBody>
+          <a:bodyPr rtlCol="0" anchor="ctr"/>
+          <a:lstStyle/>
+          <a:p>
+            <a:pPr algn="ctr"/>
+            <a:endParaRPr/>
+          </a:p>
+        </p:txBody>
+      </p:sp>
+      <p:sp>
+        <p:nvSpPr>
+          <p:cNvPr id="3" name="TextBox 2"/>
+          <p:cNvSpPr txBox="1"/>
+          <p:nvPr/>
+        </p:nvSpPr>
+        <p:spPr>
+          <a:xfrm>
+            <a:off x="457200" y="274320"/>
+            <a:ext cx="10972800" cy="731520"/>
+          </a:xfrm>
+          <a:prstGeom prst="rect">
+            <a:avLst/>
+          </a:prstGeom>
+          <a:noFill/>
+        </p:spPr>
+        <p:txBody>
+          <a:bodyPr wrap="square"/>
+          <a:lstStyle/>
+          <a:p>
+            <a:pPr algn="l">
+              <a:defRPr sz="3200" b="1">
+                <a:solidFill>
+                  <a:srgbClr val="22627E"/>
+                </a:solidFill>
+                <a:latin typeface="Calibri"/>
+              </a:defRPr>
+            </a:pPr>
+            <a:r>
+              <a:t>Estimar costes de un proyecto Fabric</a:t>
+            </a:r>
+          </a:p>
+        </p:txBody>
+      </p:sp>
+      <p:sp>
+        <p:nvSpPr>
+          <p:cNvPr id="4" name="Rectangle 3"/>
+          <p:cNvSpPr/>
+          <p:nvPr/>
+        </p:nvSpPr>
+        <p:spPr>
+          <a:xfrm>
+            <a:off x="457200" y="1051560"/>
+            <a:ext cx="10972800" cy="27432"/>
+          </a:xfrm>
+          <a:prstGeom prst="rect">
+            <a:avLst/>
+          </a:prstGeom>
+          <a:solidFill>
+            <a:srgbClr val="22627E"/>
+          </a:solidFill>
+          <a:ln>
+            <a:noFill/>
+          </a:ln>
+        </p:spPr>
+        <p:style>
+          <a:lnRef idx="1">
+            <a:schemeClr val="accent1"/>
+          </a:lnRef>
+          <a:fillRef idx="3">
+            <a:schemeClr val="accent1"/>
+          </a:fillRef>
+          <a:effectRef idx="2">
+            <a:schemeClr val="accent1"/>
+          </a:effectRef>
+          <a:fontRef idx="minor">
+            <a:schemeClr val="lt1"/>
+          </a:fontRef>
+        </p:style>
+        <p:txBody>
+          <a:bodyPr rtlCol="0" anchor="ctr"/>
+          <a:lstStyle/>
+          <a:p>
+            <a:pPr algn="ctr"/>
+            <a:endParaRPr/>
+          </a:p>
+        </p:txBody>
+      </p:sp>
+      <p:sp>
+        <p:nvSpPr>
+          <p:cNvPr id="5" name="TextBox 4"/>
+          <p:cNvSpPr txBox="1"/>
+          <p:nvPr/>
+        </p:nvSpPr>
+        <p:spPr>
+          <a:xfrm>
+            <a:off x="640080" y="1280160"/>
+            <a:ext cx="10515600" cy="5029200"/>
+          </a:xfrm>
+          <a:prstGeom prst="rect">
+            <a:avLst/>
+          </a:prstGeom>
+          <a:noFill/>
+        </p:spPr>
+        <p:txBody>
+          <a:bodyPr wrap="square">
+            <a:spAutoFit/>
+          </a:bodyPr>
+          <a:lstStyle/>
+          <a:p>
+            <a:pPr>
+              <a:spcAft>
+                <a:spcPts val="800"/>
+              </a:spcAft>
+              <a:defRPr sz="2000">
+                <a:solidFill>
+                  <a:srgbClr val="333333"/>
+                </a:solidFill>
+                <a:latin typeface="Calibri"/>
+              </a:defRPr>
+            </a:pPr>
+            <a:r>
+              <a:t>Infraestructura:</a:t>
+            </a:r>
+          </a:p>
+          <a:p>
+            <a:pPr lvl="1">
+              <a:spcAft>
+                <a:spcPts val="400"/>
+              </a:spcAft>
+              <a:defRPr sz="1700">
+                <a:solidFill>
+                  <a:srgbClr val="666666"/>
+                </a:solidFill>
+                <a:latin typeface="Calibri"/>
+              </a:defRPr>
+            </a:pPr>
+            <a:r>
+              <a:t>    Servidores/cloud para peers, orderers, CAs, CouchDB</a:t>
+            </a:r>
+          </a:p>
+          <a:p>
+            <a:pPr lvl="1">
+              <a:spcAft>
+                <a:spcPts val="400"/>
+              </a:spcAft>
+              <a:defRPr sz="1700">
+                <a:solidFill>
+                  <a:srgbClr val="666666"/>
+                </a:solidFill>
+                <a:latin typeface="Calibri"/>
+              </a:defRPr>
+            </a:pPr>
+            <a:r>
+              <a:t>    Estimacion: 500-2000 EUR/mes por organizacion (cloud)</a:t>
+            </a:r>
+          </a:p>
+          <a:p>
+            <a:pPr lvl="1">
+              <a:spcAft>
+                <a:spcPts val="400"/>
+              </a:spcAft>
+              <a:defRPr sz="1700">
+                <a:solidFill>
+                  <a:srgbClr val="666666"/>
+                </a:solidFill>
+                <a:latin typeface="Calibri"/>
+              </a:defRPr>
+            </a:pPr>
+            <a:r>
+              <a:t>    Mas barato on-premise pero requiere equipo de sistemas</a:t>
+            </a:r>
+          </a:p>
+          <a:p>
+            <a:pPr>
+              <a:spcAft>
+                <a:spcPts val="800"/>
+              </a:spcAft>
+              <a:defRPr sz="2000">
+                <a:solidFill>
+                  <a:srgbClr val="333333"/>
+                </a:solidFill>
+                <a:latin typeface="Calibri"/>
+              </a:defRPr>
+            </a:pPr>
+            <a:r>
+              <a:t>Desarrollo:</a:t>
+            </a:r>
+          </a:p>
+          <a:p>
+            <a:pPr lvl="1">
+              <a:spcAft>
+                <a:spcPts val="400"/>
+              </a:spcAft>
+              <a:defRPr sz="1700">
+                <a:solidFill>
+                  <a:srgbClr val="666666"/>
+                </a:solidFill>
+                <a:latin typeface="Calibri"/>
+              </a:defRPr>
+            </a:pPr>
+            <a:r>
+              <a:t>    Chaincodes: 2-6 meses de desarrollo segun complejidad</a:t>
+            </a:r>
+          </a:p>
+          <a:p>
+            <a:pPr lvl="1">
+              <a:spcAft>
+                <a:spcPts val="400"/>
+              </a:spcAft>
+              <a:defRPr sz="1700">
+                <a:solidFill>
+                  <a:srgbClr val="666666"/>
+                </a:solidFill>
+                <a:latin typeface="Calibri"/>
+              </a:defRPr>
+            </a:pPr>
+            <a:r>
+              <a:t>    Aplicacion cliente: 1-3 meses adicionales</a:t>
+            </a:r>
+          </a:p>
+          <a:p>
+            <a:pPr lvl="1">
+              <a:spcAft>
+                <a:spcPts val="400"/>
+              </a:spcAft>
+              <a:defRPr sz="1700">
+                <a:solidFill>
+                  <a:srgbClr val="666666"/>
+                </a:solidFill>
+                <a:latin typeface="Calibri"/>
+              </a:defRPr>
+            </a:pPr>
+            <a:r>
+              <a:t>    Integracion con sistemas legacy: el coste mas impredecible</a:t>
+            </a:r>
+          </a:p>
+          <a:p>
+            <a:pPr>
+              <a:spcAft>
+                <a:spcPts val="800"/>
+              </a:spcAft>
+              <a:defRPr sz="2000">
+                <a:solidFill>
+                  <a:srgbClr val="333333"/>
+                </a:solidFill>
+                <a:latin typeface="Calibri"/>
+              </a:defRPr>
+            </a:pPr>
+            <a:r>
+              <a:t>Operaciones:</a:t>
+            </a:r>
+          </a:p>
+          <a:p>
+            <a:pPr lvl="1">
+              <a:spcAft>
+                <a:spcPts val="400"/>
+              </a:spcAft>
+              <a:defRPr sz="1700">
+                <a:solidFill>
+                  <a:srgbClr val="666666"/>
+                </a:solidFill>
+                <a:latin typeface="Calibri"/>
+              </a:defRPr>
+            </a:pPr>
+            <a:r>
+              <a:t>    Administracion de la red: 0.5-1 persona por org</a:t>
+            </a:r>
+          </a:p>
+          <a:p>
+            <a:pPr lvl="1">
+              <a:spcAft>
+                <a:spcPts val="400"/>
+              </a:spcAft>
+              <a:defRPr sz="1700">
+                <a:solidFill>
+                  <a:srgbClr val="666666"/>
+                </a:solidFill>
+                <a:latin typeface="Calibri"/>
+              </a:defRPr>
+            </a:pPr>
+            <a:r>
+              <a:t>    Soporte y mantenimiento: 20-30% del coste de desarrollo anual</a:t>
+            </a:r>
+          </a:p>
+          <a:p>
+            <a:pPr lvl="1">
+              <a:spcAft>
+                <a:spcPts val="400"/>
+              </a:spcAft>
+              <a:defRPr sz="1700">
+                <a:solidFill>
+                  <a:srgbClr val="666666"/>
+                </a:solidFill>
+                <a:latin typeface="Calibri"/>
+              </a:defRPr>
+            </a:pPr>
+            <a:r>
+              <a:t>    Gobernanza: reuniones, comites, decision-making (tiempo de directivos)</a:t>
+            </a:r>
+          </a:p>
+        </p:txBody>
+      </p:sp>
+    </p:spTree>
+  </p:cSld>
+  <p:clrMapOvr>
+    <a:masterClrMapping/>
+  </p:clrMapOvr>
+</p:sld>
+</file>
+
+<file path=ppt/slides/slide6.xml><?xml version="1.0" encoding="utf-8"?>
+<p:sld xmlns:a="http://schemas.openxmlformats.org/drawingml/2006/main" xmlns:r="http://schemas.openxmlformats.org/officeDocument/2006/relationships" xmlns:p="http://schemas.openxmlformats.org/presentationml/2006/main">
+  <p:cSld>
+    <p:spTree>
+      <p:nvGrpSpPr>
+        <p:cNvPr id="1" name=""/>
+        <p:cNvGrpSpPr/>
+        <p:nvPr/>
+      </p:nvGrpSpPr>
+      <p:grpSpPr>
+        <a:xfrm>
+          <a:off x="0" y="0"/>
+          <a:ext cx="0" cy="0"/>
+          <a:chOff x="0" y="0"/>
+          <a:chExt cx="0" cy="0"/>
+        </a:xfrm>
+      </p:grpSpPr>
+      <p:sp>
+        <p:nvSpPr>
+          <p:cNvPr id="2" name="Rectangle 1"/>
+          <p:cNvSpPr/>
+          <p:nvPr/>
+        </p:nvSpPr>
+        <p:spPr>
+          <a:xfrm>
+            <a:off x="0" y="0"/>
+            <a:ext cx="12188952" cy="73152"/>
+          </a:xfrm>
+          <a:prstGeom prst="rect">
+            <a:avLst/>
+          </a:prstGeom>
+          <a:solidFill>
+            <a:srgbClr val="22627E"/>
+          </a:solidFill>
+          <a:ln>
+            <a:noFill/>
+          </a:ln>
+        </p:spPr>
+        <p:style>
+          <a:lnRef idx="1">
+            <a:schemeClr val="accent1"/>
+          </a:lnRef>
+          <a:fillRef idx="3">
+            <a:schemeClr val="accent1"/>
+          </a:fillRef>
+          <a:effectRef idx="2">
+            <a:schemeClr val="accent1"/>
+          </a:effectRef>
+          <a:fontRef idx="minor">
+            <a:schemeClr val="lt1"/>
+          </a:fontRef>
+        </p:style>
+        <p:txBody>
+          <a:bodyPr rtlCol="0" anchor="ctr"/>
+          <a:lstStyle/>
+          <a:p>
+            <a:pPr algn="ctr"/>
+            <a:endParaRPr/>
+          </a:p>
+        </p:txBody>
+      </p:sp>
+      <p:sp>
+        <p:nvSpPr>
+          <p:cNvPr id="3" name="TextBox 2"/>
+          <p:cNvSpPr txBox="1"/>
+          <p:nvPr/>
+        </p:nvSpPr>
+        <p:spPr>
+          <a:xfrm>
+            <a:off x="457200" y="274320"/>
+            <a:ext cx="10972800" cy="731520"/>
+          </a:xfrm>
+          <a:prstGeom prst="rect">
+            <a:avLst/>
+          </a:prstGeom>
+          <a:noFill/>
+        </p:spPr>
+        <p:txBody>
+          <a:bodyPr wrap="square"/>
+          <a:lstStyle/>
+          <a:p>
+            <a:pPr algn="l">
+              <a:defRPr sz="3200" b="1">
+                <a:solidFill>
+                  <a:srgbClr val="22627E"/>
+                </a:solidFill>
+                <a:latin typeface="Calibri"/>
+              </a:defRPr>
+            </a:pPr>
+            <a:r>
+              <a:t>Roadmap tipico de un proyecto Fabric</a:t>
+            </a:r>
+          </a:p>
+        </p:txBody>
+      </p:sp>
+      <p:sp>
+        <p:nvSpPr>
+          <p:cNvPr id="4" name="Rectangle 3"/>
+          <p:cNvSpPr/>
+          <p:nvPr/>
+        </p:nvSpPr>
+        <p:spPr>
+          <a:xfrm>
+            <a:off x="457200" y="1051560"/>
+            <a:ext cx="10972800" cy="27432"/>
+          </a:xfrm>
+          <a:prstGeom prst="rect">
+            <a:avLst/>
+          </a:prstGeom>
+          <a:solidFill>
+            <a:srgbClr val="22627E"/>
+          </a:solidFill>
+          <a:ln>
+            <a:noFill/>
+          </a:ln>
+        </p:spPr>
+        <p:style>
+          <a:lnRef idx="1">
+            <a:schemeClr val="accent1"/>
+          </a:lnRef>
+          <a:fillRef idx="3">
+            <a:schemeClr val="accent1"/>
+          </a:fillRef>
+          <a:effectRef idx="2">
+            <a:schemeClr val="accent1"/>
+          </a:effectRef>
+          <a:fontRef idx="minor">
+            <a:schemeClr val="lt1"/>
+          </a:fontRef>
+        </p:style>
+        <p:txBody>
+          <a:bodyPr rtlCol="0" anchor="ctr"/>
+          <a:lstStyle/>
+          <a:p>
+            <a:pPr algn="ctr"/>
+            <a:endParaRPr/>
+          </a:p>
+        </p:txBody>
+      </p:sp>
+      <p:sp>
+        <p:nvSpPr>
+          <p:cNvPr id="5" name="TextBox 4"/>
+          <p:cNvSpPr txBox="1"/>
+          <p:nvPr/>
+        </p:nvSpPr>
+        <p:spPr>
+          <a:xfrm>
+            <a:off x="640080" y="1280160"/>
+            <a:ext cx="10515600" cy="5029200"/>
+          </a:xfrm>
+          <a:prstGeom prst="rect">
+            <a:avLst/>
+          </a:prstGeom>
+          <a:noFill/>
+        </p:spPr>
+        <p:txBody>
+          <a:bodyPr wrap="square">
+            <a:spAutoFit/>
+          </a:bodyPr>
+          <a:lstStyle/>
+          <a:p>
+            <a:pPr>
+              <a:spcAft>
+                <a:spcPts val="800"/>
+              </a:spcAft>
+              <a:defRPr sz="2000">
+                <a:solidFill>
+                  <a:srgbClr val="333333"/>
+                </a:solidFill>
+                <a:latin typeface="Calibri"/>
+              </a:defRPr>
+            </a:pPr>
+            <a:r>
               <a:t>Mes 1-2: Descubrimiento</a:t>
             </a:r>
           </a:p>
@@ -4732,6 +8032,7 @@
                 <a:latin typeface="Calibri"/>
               </a:defRPr>
             </a:pPr>
+            <a:endParaRPr/>
           </a:p>
           <a:p>
             <a:pPr>
@@ -4777,6 +8078,7 @@
                 <a:latin typeface="Calibri"/>
               </a:defRPr>
             </a:pPr>
+            <a:endParaRPr/>
           </a:p>
           <a:p>
             <a:pPr>
@@ -4822,6 +8124,7 @@
                 <a:latin typeface="Calibri"/>
               </a:defRPr>
             </a:pPr>
+            <a:endParaRPr/>
           </a:p>
           <a:p>
             <a:pPr>
@@ -4867,6 +8170,7 @@
                 <a:latin typeface="Calibri"/>
               </a:defRPr>
             </a:pPr>
+            <a:endParaRPr/>
           </a:p>
           <a:p>
             <a:pPr>
@@ -4911,7 +8215,7 @@
 </file>
 
 <file path=ppt/slides/slide7.xml><?xml version="1.0" encoding="utf-8"?>
-<p:sld xmlns:a="http://schemas.openxmlformats.org/drawingml/2006/main" xmlns:p="http://schemas.openxmlformats.org/presentationml/2006/main" xmlns:r="http://schemas.openxmlformats.org/officeDocument/2006/relationships">
+<p:sld xmlns:a="http://schemas.openxmlformats.org/drawingml/2006/main" xmlns:r="http://schemas.openxmlformats.org/officeDocument/2006/relationships" xmlns:p="http://schemas.openxmlformats.org/presentationml/2006/main">
   <p:cSld>
     <p:spTree>
       <p:nvGrpSpPr>
@@ -4919,7 +8223,14 @@
         <p:cNvGrpSpPr/>
         <p:nvPr/>
       </p:nvGrpSpPr>
-      <p:grpSpPr/>
+      <p:grpSpPr>
+        <a:xfrm>
+          <a:off x="0" y="0"/>
+          <a:ext cx="0" cy="0"/>
+          <a:chOff x="0" y="0"/>
+          <a:chExt cx="0" cy="0"/>
+        </a:xfrm>
+      </p:grpSpPr>
       <p:sp>
         <p:nvSpPr>
           <p:cNvPr id="2" name="Rectangle 1"/>
@@ -4960,6 +8271,7 @@
           <a:lstStyle/>
           <a:p>
             <a:pPr algn="ctr"/>
+            <a:endParaRPr/>
           </a:p>
         </p:txBody>
       </p:sp>
@@ -5003,6 +8315,7 @@
           <a:lstStyle/>
           <a:p>
             <a:pPr algn="ctr"/>
+            <a:endParaRPr/>
           </a:p>
         </p:txBody>
       </p:sp>
@@ -5114,6 +8427,7 @@
           <a:lstStyle/>
           <a:p>
             <a:pPr algn="ctr"/>
+            <a:endParaRPr/>
           </a:p>
         </p:txBody>
       </p:sp>
@@ -5166,6 +8480,7 @@
                 <a:latin typeface="Calibri"/>
               </a:defRPr>
             </a:pPr>
+            <a:endParaRPr/>
           </a:p>
           <a:p>
             <a:pPr>
@@ -5307,6 +8622,7 @@
                 <a:latin typeface="Calibri"/>
               </a:defRPr>
             </a:pPr>
+            <a:endParaRPr/>
           </a:p>
           <a:p>
             <a:pPr>
@@ -5351,7 +8667,7 @@
 </file>
 
 <file path=ppt/slides/slide8.xml><?xml version="1.0" encoding="utf-8"?>
-<p:sld xmlns:a="http://schemas.openxmlformats.org/drawingml/2006/main" xmlns:p="http://schemas.openxmlformats.org/presentationml/2006/main" xmlns:r="http://schemas.openxmlformats.org/officeDocument/2006/relationships">
+<p:sld xmlns:a="http://schemas.openxmlformats.org/drawingml/2006/main" xmlns:r="http://schemas.openxmlformats.org/officeDocument/2006/relationships" xmlns:p="http://schemas.openxmlformats.org/presentationml/2006/main">
   <p:cSld>
     <p:spTree>
       <p:nvGrpSpPr>
@@ -5359,7 +8675,14 @@
         <p:cNvGrpSpPr/>
         <p:nvPr/>
       </p:nvGrpSpPr>
-      <p:grpSpPr/>
+      <p:grpSpPr>
+        <a:xfrm>
+          <a:off x="0" y="0"/>
+          <a:ext cx="0" cy="0"/>
+          <a:chOff x="0" y="0"/>
+          <a:chExt cx="0" cy="0"/>
+        </a:xfrm>
+      </p:grpSpPr>
       <p:sp>
         <p:nvSpPr>
           <p:cNvPr id="2" name="Rectangle 1"/>
@@ -5400,6 +8723,7 @@
           <a:lstStyle/>
           <a:p>
             <a:pPr algn="ctr"/>
+            <a:endParaRPr/>
           </a:p>
         </p:txBody>
       </p:sp>
@@ -5443,6 +8767,7 @@
           <a:lstStyle/>
           <a:p>
             <a:pPr algn="ctr"/>
+            <a:endParaRPr/>
           </a:p>
         </p:txBody>
       </p:sp>
@@ -5554,6 +8879,7 @@
           <a:lstStyle/>
           <a:p>
             <a:pPr algn="ctr"/>
+            <a:endParaRPr/>
           </a:p>
         </p:txBody>
       </p:sp>
@@ -5669,7 +8995,7 @@
 </file>
 
 <file path=ppt/slides/slide9.xml><?xml version="1.0" encoding="utf-8"?>
-<p:sld xmlns:a="http://schemas.openxmlformats.org/drawingml/2006/main" xmlns:p="http://schemas.openxmlformats.org/presentationml/2006/main" xmlns:r="http://schemas.openxmlformats.org/officeDocument/2006/relationships">
+<p:sld xmlns:a="http://schemas.openxmlformats.org/drawingml/2006/main" xmlns:r="http://schemas.openxmlformats.org/officeDocument/2006/relationships" xmlns:p="http://schemas.openxmlformats.org/presentationml/2006/main">
   <p:cSld>
     <p:spTree>
       <p:nvGrpSpPr>
@@ -5677,7 +9003,14 @@
         <p:cNvGrpSpPr/>
         <p:nvPr/>
       </p:nvGrpSpPr>
-      <p:grpSpPr/>
+      <p:grpSpPr>
+        <a:xfrm>
+          <a:off x="0" y="0"/>
+          <a:ext cx="0" cy="0"/>
+          <a:chOff x="0" y="0"/>
+          <a:chExt cx="0" cy="0"/>
+        </a:xfrm>
+      </p:grpSpPr>
       <p:sp>
         <p:nvSpPr>
           <p:cNvPr id="2" name="Rectangle 1"/>
@@ -5718,6 +9051,7 @@
           <a:lstStyle/>
           <a:p>
             <a:pPr algn="ctr"/>
+            <a:endParaRPr/>
           </a:p>
         </p:txBody>
       </p:sp>
@@ -5795,6 +9129,7 @@
           <a:lstStyle/>
           <a:p>
             <a:pPr algn="ctr"/>
+            <a:endParaRPr/>
           </a:p>
         </p:txBody>
       </p:sp>
